--- a/deliverables/Pilot_Timeline_Electrical_Ruler_SCo_2026-10-26.pptx
+++ b/deliverables/Pilot_Timeline_Electrical_Ruler_SCo_2026-10-26.pptx
@@ -7,9 +7,10 @@
   <p:sldIdLst>
     <p:sldId id="256" r:id="rId2"/>
     <p:sldId id="257" r:id="rId3"/>
+    <p:sldId id="258" r:id="rId4"/>
   </p:sldIdLst>
   <p:notesMasterIdLst>
-    <p:notesMasterId r:id="rId4"/>
+    <p:notesMasterId r:id="rId5"/>
   </p:notesMasterIdLst>
   <p:sldSz cx="12192000" cy="6858000"/>
   <p:notesSz cx="6858000" cy="12192000"/>
@@ -108,10 +109,11 @@
   <p:extLst>
     <p:ext uri="{521415D9-36F7-43E2-AB2F-B90AF26B5E84}">
       <p14:sectionLst xmlns:p14="http://schemas.microsoft.com/office/powerpoint/2010/main">
-        <p14:section name="Pilot timeline" id="{1e3afaf4-022f-3dbd-c432-bd3e7842f391}">
+        <p14:section name="Pilot timeline" id="{bc305693-716b-a1ab-282e-7dbce1b68ab5}">
           <p14:sldIdLst>
             <p14:sldId id="256"/>
             <p14:sldId id="257"/>
+            <p14:sldId id="258"/>
           </p14:sldIdLst>
         </p14:section>
       </p14:sectionLst>
@@ -518,7 +520,7 @@
           <a:p>
             <a:r>
               <a:rPr lang="en-US" dirty="0"/>
-              <a:t>Revised from the earlier plan, which showed the customisation step as completed. In practice only an initial discussion with the PETRONAS Principal (Electrical) has happened: PETRONAS shared part of its broad-based electrical ruler and the rest is awaiting PETRONAS management approval. Dates after Step 1 are proposals and shift one-for-one with the approval date.</a:t>
+              <a:t>Agreed split: WS1 Generic Electrical Engineering led by the India Team (Yusri to reach out to Sid for assistance and coordination); WS2 Renewables-specific Electrical Engineering (Solar, Energy Storage, Wind) led by Halem and team; WS3 Job Competency Profile / Job Family led by Nizam, running in parallel to keep the JCP aligned with the capability framework. WS1 and WS2 are the primary focus. The workstreams reconvene on Thursday 15 Oct 2026.</a:t>
             </a:r>
             <a:endParaRPr lang="en-US" dirty="0"/>
           </a:p>
@@ -606,7 +608,7 @@
           <a:p>
             <a:r>
               <a:rPr lang="en-US" dirty="0"/>
-              <a:t>Gantt is built from proposed windows. Dates move with the PETRONAS approval date in Step 1. The enabling row (identify and brief pilot group) runs in parallel with Steps 2 and 3 so the group is ready when the ruler is finalised. The earlier lifecycle plan had pilot report approval at an estimated 27 Oct, handover at 18 Nov and the One Gentari showcase on 2 Dec; these need to be reset against this timeline.</a:t>
+              <a:t>Windows are proposals, not agreed dates; they should be confirmed with the workstream leads at the 15 Oct update. WS1 and WS2 converge at the review and refine stage in mid-Jan, then the pilot group is assessed against the combined ruler. WS3 runs in parallel so the JCP/JF is aligned with the capability framework before the pilot assessment starts. Assumption: the PETRONAS ruler feeds WS1 (generic electrical); WS2 develops renewables-specific requirements.</a:t>
             </a:r>
             <a:endParaRPr lang="en-US" dirty="0"/>
           </a:p>
@@ -630,6 +632,94 @@
             <a:fld id="{F7021451-1387-4CA6-816F-3879F97B5CBC}" type="slidenum">
               <a:rPr lang="en-US"/>
               <a:t>2</a:t>
+            </a:fld>
+            <a:endParaRPr lang="en-US"/>
+          </a:p>
+        </p:txBody>
+      </p:sp>
+    </p:spTree>
+    <p:extLst>
+      <p:ext uri="{BB962C8B-B14F-4D97-AF65-F5344CB8AC3E}">
+        <p14:creationId xmlns:p14="http://schemas.microsoft.com/office/powerpoint/2010/main" val="1024086991"/>
+      </p:ext>
+    </p:extLst>
+  </p:cSld>
+  <p:clrMapOvr>
+    <a:masterClrMapping/>
+  </p:clrMapOvr>
+</p:notes>
+</file>
+
+<file path=ppt/notesSlides/notesSlide3.xml><?xml version="1.0" encoding="utf-8"?>
+<p:notes xmlns:a="http://schemas.openxmlformats.org/drawingml/2006/main" xmlns:r="http://schemas.openxmlformats.org/officeDocument/2006/relationships" xmlns:p="http://schemas.openxmlformats.org/presentationml/2006/main">
+  <p:cSld>
+    <p:spTree>
+      <p:nvGrpSpPr>
+        <p:cNvPr id="1" name=""/>
+        <p:cNvGrpSpPr/>
+        <p:nvPr/>
+      </p:nvGrpSpPr>
+      <p:grpSpPr>
+        <a:xfrm>
+          <a:off x="0" y="0"/>
+          <a:ext cx="0" cy="0"/>
+          <a:chOff x="0" y="0"/>
+          <a:chExt cx="0" cy="0"/>
+        </a:xfrm>
+      </p:grpSpPr>
+      <p:sp>
+        <p:nvSpPr>
+          <p:cNvPr id="2" name="Slide Image Placeholder 1"/>
+          <p:cNvSpPr>
+            <a:spLocks noGrp="1" noRot="1" noChangeAspect="1"/>
+          </p:cNvSpPr>
+          <p:nvPr>
+            <p:ph type="sldImg"/>
+          </p:nvPr>
+        </p:nvSpPr>
+        <p:spPr/>
+      </p:sp>
+      <p:sp>
+        <p:nvSpPr>
+          <p:cNvPr id="3" name="Notes Placeholder 2"/>
+          <p:cNvSpPr>
+            <a:spLocks noGrp="1"/>
+          </p:cNvSpPr>
+          <p:nvPr>
+            <p:ph type="body" idx="1"/>
+          </p:nvPr>
+        </p:nvSpPr>
+        <p:spPr/>
+        <p:txBody>
+          <a:bodyPr/>
+          <a:lstStyle/>
+          <a:p>
+            <a:r>
+              <a:rPr lang="en-US" dirty="0"/>
+              <a:t>Next steps are as agreed on 8 Oct: Ungku updates and circulates the deck; Yusri reaches out to Sid for WS1; workstreams reconvene on Thursday 15 Oct 2026. The SCo asks and risks carry over from the earlier version and now also cover workstream alignment. The earlier lifecycle plan had pilot report approval at an estimated 27 Oct, handover at 18 Nov and the One Gentari showcase on 2 Dec; these need to be reset against this timeline.</a:t>
+            </a:r>
+            <a:endParaRPr lang="en-US" dirty="0"/>
+          </a:p>
+        </p:txBody>
+      </p:sp>
+      <p:sp>
+        <p:nvSpPr>
+          <p:cNvPr id="4" name="Slide Number Placeholder 3"/>
+          <p:cNvSpPr>
+            <a:spLocks noGrp="1"/>
+          </p:cNvSpPr>
+          <p:nvPr>
+            <p:ph type="sldNum" sz="quarter" idx="10"/>
+          </p:nvPr>
+        </p:nvSpPr>
+        <p:spPr/>
+        <p:txBody>
+          <a:bodyPr/>
+          <a:lstStyle/>
+          <a:p>
+            <a:fld id="{F7021451-1387-4CA6-816F-3879F97B5CBC}" type="slidenum">
+              <a:rPr lang="en-US"/>
+              <a:t>3</a:t>
             </a:fld>
             <a:endParaRPr lang="en-US"/>
           </a:p>
@@ -1082,7 +1172,7 @@
                 <a:ea typeface="Arial" pitchFamily="34" charset="-122"/>
                 <a:cs typeface="Arial" pitchFamily="34" charset="-120"/>
               </a:rPr>
-              <a:t>Electrical Competency Ruler Pilot: Revised Timeline</a:t>
+              <a:t>Pilot delivered through three workstreams</a:t>
             </a:r>
             <a:endParaRPr lang="en-US" sz="3000" dirty="0"/>
           </a:p>
@@ -1118,7 +1208,7 @@
                   <a:schemeClr val="tx2"/>
                 </a:solidFill>
               </a:rPr>
-              <a:t>Draft for Steering Committee, 26 Oct 2026  |  Pod 4: Capability &amp; Talent Strength</a:t>
+              <a:t>Agreed in team discussion, 8 Oct 2026  |  Workstreams 1 and 2 are the primary focus; Workstream 3 progresses in parallel</a:t>
             </a:r>
             <a:endParaRPr lang="en-US" sz="1400" dirty="0"/>
           </a:p>
@@ -1126,24 +1216,24 @@
       </p:sp>
       <p:sp>
         <p:nvSpPr>
-          <p:cNvPr id="4" name="Card 1"/>
+          <p:cNvPr id="4" name="WS1 card"/>
           <p:cNvSpPr/>
           <p:nvPr/>
         </p:nvSpPr>
         <p:spPr>
           <a:xfrm>
-            <a:off x="554584" y="1691640"/>
-            <a:ext cx="1664208" cy="2834640"/>
+            <a:off x="550012" y="1600200"/>
+            <a:ext cx="3520440" cy="3520440"/>
           </a:xfrm>
           <a:prstGeom prst="roundRect">
             <a:avLst>
-              <a:gd name="adj" fmla="val 9890"/>
+              <a:gd name="adj" fmla="val 3896"/>
             </a:avLst>
           </a:prstGeom>
           <a:solidFill>
             <a:schemeClr val="bg1"/>
           </a:solidFill>
-          <a:ln w="19050">
+          <a:ln w="25400">
             <a:solidFill>
               <a:schemeClr val="accent1"/>
             </a:solidFill>
@@ -1153,14 +1243,54 @@
       </p:sp>
       <p:sp>
         <p:nvSpPr>
-          <p:cNvPr id="5" name="Card 1 text"/>
+          <p:cNvPr id="5" name="WS1 tag"/>
+          <p:cNvSpPr/>
+          <p:nvPr/>
+        </p:nvSpPr>
+        <p:spPr>
+          <a:xfrm>
+            <a:off x="778612" y="1828800"/>
+            <a:ext cx="1325880" cy="256032"/>
+          </a:xfrm>
+          <a:prstGeom prst="roundRect">
+            <a:avLst>
+              <a:gd name="adj" fmla="val 46429"/>
+            </a:avLst>
+          </a:prstGeom>
+          <a:solidFill>
+            <a:schemeClr val="accent1"/>
+          </a:solidFill>
+          <a:ln/>
+        </p:spPr>
+        <p:txBody>
+          <a:bodyPr wrap="square" lIns="0" tIns="0" rIns="0" bIns="0" rtlCol="0" anchor="ctr"/>
+          <a:lstStyle/>
+          <a:p>
+            <a:pPr algn="ctr" indent="0" marL="0">
+              <a:buNone/>
+            </a:pPr>
+            <a:r>
+              <a:rPr lang="en-US" sz="1000" b="1" dirty="0">
+                <a:solidFill>
+                  <a:schemeClr val="bg1"/>
+                </a:solidFill>
+              </a:rPr>
+              <a:t>PRIMARY FOCUS</a:t>
+            </a:r>
+            <a:endParaRPr lang="en-US" sz="1000" dirty="0"/>
+          </a:p>
+        </p:txBody>
+      </p:sp>
+      <p:sp>
+        <p:nvSpPr>
+          <p:cNvPr id="6" name="WS1 text"/>
           <p:cNvSpPr txBox="1"/>
           <p:nvPr/>
         </p:nvSpPr>
         <p:spPr>
           <a:xfrm>
-            <a:off x="664312" y="1828800"/>
-            <a:ext cx="1444752" cy="2057400"/>
+            <a:off x="778612" y="2221992"/>
+            <a:ext cx="3063240" cy="2743200"/>
           </a:xfrm>
           <a:prstGeom prst="rect">
             <a:avLst/>
@@ -1179,147 +1309,115 @@
               <a:buNone/>
             </a:pPr>
             <a:r>
-              <a:rPr lang="en-US" sz="1000" b="1" dirty="0">
+              <a:rPr lang="en-US" sz="1100" b="1" dirty="0">
                 <a:solidFill>
                   <a:schemeClr val="accent1"/>
                 </a:solidFill>
               </a:rPr>
-              <a:t>STEP 1</a:t>
-            </a:r>
-            <a:endParaRPr lang="en-US" sz="1000" dirty="0"/>
+              <a:t>WORKSTREAM 1</a:t>
+            </a:r>
+            <a:endParaRPr lang="en-US" sz="1100" dirty="0"/>
           </a:p>
           <a:p>
             <a:pPr indent="0" marL="0">
               <a:spcAft>
-                <a:spcPts val="600"/>
+                <a:spcPts val="1000"/>
               </a:spcAft>
               <a:buNone/>
             </a:pPr>
             <a:r>
-              <a:rPr lang="en-US" sz="1300" b="1" dirty="0">
+              <a:rPr lang="en-US" sz="1800" b="1" dirty="0">
                 <a:solidFill>
                   <a:schemeClr val="tx1"/>
                 </a:solidFill>
               </a:rPr>
-              <a:t>Secure PETRONAS Electrical ruler</a:t>
-            </a:r>
-            <a:endParaRPr lang="en-US" sz="1000" dirty="0"/>
-          </a:p>
-          <a:p>
-            <a:pPr indent="0" marL="0">
-              <a:buNone/>
-            </a:pPr>
-            <a:r>
-              <a:rPr lang="en-US" sz="1100" dirty="0">
+              <a:t>Generic Electrical Engineering</a:t>
+            </a:r>
+            <a:endParaRPr lang="en-US" sz="1100" dirty="0"/>
+          </a:p>
+          <a:p>
+            <a:pPr indent="0" marL="0">
+              <a:buNone/>
+            </a:pPr>
+            <a:r>
+              <a:rPr lang="en-US" sz="1400" b="1" dirty="0">
+                <a:solidFill>
+                  <a:schemeClr val="tx1"/>
+                </a:solidFill>
+              </a:rPr>
+              <a:t>Lead: </a:t>
+            </a:r>
+            <a:pPr indent="0" marL="0">
+              <a:spcAft>
+                <a:spcPts val="1000"/>
+              </a:spcAft>
+              <a:buNone/>
+            </a:pPr>
+            <a:r>
+              <a:rPr lang="en-US" sz="1400" dirty="0">
+                <a:solidFill>
+                  <a:schemeClr val="tx1"/>
+                </a:solidFill>
+              </a:rPr>
+              <a:t>India Team</a:t>
+            </a:r>
+            <a:endParaRPr lang="en-US" sz="1100" dirty="0"/>
+          </a:p>
+          <a:p>
+            <a:pPr indent="0" marL="0">
+              <a:spcAft>
+                <a:spcPts val="1000"/>
+              </a:spcAft>
+              <a:buNone/>
+            </a:pPr>
+            <a:r>
+              <a:rPr lang="en-US" sz="1300" dirty="0">
                 <a:solidFill>
                   <a:schemeClr val="tx2"/>
                 </a:solidFill>
               </a:rPr>
-              <a:t>Initial discussion held. Partial base ruler shared; full release pending PETRONAS management approval.</a:t>
-            </a:r>
-            <a:endParaRPr lang="en-US" sz="1000" dirty="0"/>
-          </a:p>
-        </p:txBody>
-      </p:sp>
-      <p:sp>
-        <p:nvSpPr>
-          <p:cNvPr id="6" name="Status 1"/>
+              <a:t>Capability requirements for generic electrical engineering, starting from the PETRONAS electrical ruler.</a:t>
+            </a:r>
+            <a:endParaRPr lang="en-US" sz="1100" dirty="0"/>
+          </a:p>
+          <a:p>
+            <a:pPr indent="0" marL="0">
+              <a:buNone/>
+            </a:pPr>
+            <a:r>
+              <a:rPr lang="en-US" sz="1300" i="1" dirty="0">
+                <a:solidFill>
+                  <a:schemeClr val="tx1"/>
+                </a:solidFill>
+              </a:rPr>
+              <a:t>Yusri to reach out to Sid for assistance and coordination.</a:t>
+            </a:r>
+            <a:endParaRPr lang="en-US" sz="1100" dirty="0"/>
+          </a:p>
+        </p:txBody>
+      </p:sp>
+      <p:sp>
+        <p:nvSpPr>
+          <p:cNvPr id="7" name="WS2 card"/>
           <p:cNvSpPr/>
           <p:nvPr/>
         </p:nvSpPr>
         <p:spPr>
           <a:xfrm>
-            <a:off x="883768" y="4069080"/>
-            <a:ext cx="1005840" cy="274320"/>
+            <a:off x="4335628" y="1600200"/>
+            <a:ext cx="3520440" cy="3520440"/>
           </a:xfrm>
           <a:prstGeom prst="roundRect">
             <a:avLst>
-              <a:gd name="adj" fmla="val 46667"/>
+              <a:gd name="adj" fmla="val 3896"/>
             </a:avLst>
           </a:prstGeom>
           <a:solidFill>
-            <a:schemeClr val="accent3"/>
-          </a:solidFill>
-          <a:ln/>
-        </p:spPr>
-        <p:txBody>
-          <a:bodyPr wrap="square" lIns="0" tIns="0" rIns="0" bIns="0" rtlCol="0" anchor="ctr"/>
-          <a:lstStyle/>
-          <a:p>
-            <a:pPr algn="ctr" indent="0" marL="0">
-              <a:buNone/>
-            </a:pPr>
-            <a:r>
-              <a:rPr lang="en-US" sz="1100" b="1" dirty="0">
-                <a:solidFill>
-                  <a:schemeClr val="tx1"/>
-                </a:solidFill>
-              </a:rPr>
-              <a:t>Ongoing</a:t>
-            </a:r>
-            <a:endParaRPr lang="en-US" sz="1100" dirty="0"/>
-          </a:p>
-        </p:txBody>
-      </p:sp>
-      <p:sp>
-        <p:nvSpPr>
-          <p:cNvPr id="7" name="Date 1"/>
-          <p:cNvSpPr txBox="1"/>
-          <p:nvPr/>
-        </p:nvSpPr>
-        <p:spPr>
-          <a:xfrm>
-            <a:off x="499720" y="4663440"/>
-            <a:ext cx="1773936" cy="457200"/>
-          </a:xfrm>
-          <a:prstGeom prst="rect">
-            <a:avLst/>
-          </a:prstGeom>
-          <a:noFill/>
-          <a:ln/>
-        </p:spPr>
-        <p:txBody>
-          <a:bodyPr wrap="square" lIns="0" tIns="0" rIns="0" bIns="0" rtlCol="0" anchor="t"/>
-          <a:lstStyle/>
-          <a:p>
-            <a:pPr algn="ctr" indent="0" marL="0">
-              <a:buNone/>
-            </a:pPr>
-            <a:r>
-              <a:rPr lang="en-US" sz="1200" b="1" dirty="0">
-                <a:solidFill>
-                  <a:schemeClr val="tx1"/>
-                </a:solidFill>
-                <a:highlight>
-                  <a:srgbClr val="FFF200"/>
-                </a:highlight>
-              </a:rPr>
-              <a:t>Now – 6 Nov</a:t>
-            </a:r>
-            <a:endParaRPr lang="en-US" sz="1200" dirty="0"/>
-          </a:p>
-        </p:txBody>
-      </p:sp>
-      <p:sp>
-        <p:nvSpPr>
-          <p:cNvPr id="8" name="Arrow 1"/>
-          <p:cNvSpPr/>
-          <p:nvPr/>
-        </p:nvSpPr>
-        <p:spPr>
-          <a:xfrm>
-            <a:off x="2246224" y="3017520"/>
-            <a:ext cx="164592" cy="182880"/>
-          </a:xfrm>
-          <a:prstGeom prst="rightArrow">
-            <a:avLst/>
-          </a:prstGeom>
-          <a:solidFill>
-            <a:schemeClr val="accent4"/>
-          </a:solidFill>
-          <a:ln w="12700">
+            <a:schemeClr val="bg1"/>
+          </a:solidFill>
+          <a:ln w="25400">
             <a:solidFill>
-              <a:schemeClr val="accent4"/>
+              <a:schemeClr val="accent2"/>
             </a:solidFill>
             <a:prstDash val="solid"/>
           </a:ln>
@@ -1327,26 +1425,181 @@
       </p:sp>
       <p:sp>
         <p:nvSpPr>
-          <p:cNvPr id="9" name="Card 2"/>
+          <p:cNvPr id="8" name="WS2 tag"/>
           <p:cNvSpPr/>
           <p:nvPr/>
         </p:nvSpPr>
         <p:spPr>
           <a:xfrm>
-            <a:off x="2438248" y="1691640"/>
-            <a:ext cx="1664208" cy="2834640"/>
+            <a:off x="4564228" y="1828800"/>
+            <a:ext cx="1325880" cy="256032"/>
           </a:xfrm>
           <a:prstGeom prst="roundRect">
             <a:avLst>
-              <a:gd name="adj" fmla="val 9890"/>
+              <a:gd name="adj" fmla="val 46429"/>
             </a:avLst>
           </a:prstGeom>
           <a:solidFill>
+            <a:schemeClr val="accent2"/>
+          </a:solidFill>
+          <a:ln/>
+        </p:spPr>
+        <p:txBody>
+          <a:bodyPr wrap="square" lIns="0" tIns="0" rIns="0" bIns="0" rtlCol="0" anchor="ctr"/>
+          <a:lstStyle/>
+          <a:p>
+            <a:pPr algn="ctr" indent="0" marL="0">
+              <a:buNone/>
+            </a:pPr>
+            <a:r>
+              <a:rPr lang="en-US" sz="1000" b="1" dirty="0">
+                <a:solidFill>
+                  <a:schemeClr val="bg1"/>
+                </a:solidFill>
+              </a:rPr>
+              <a:t>PRIMARY FOCUS</a:t>
+            </a:r>
+            <a:endParaRPr lang="en-US" sz="1000" dirty="0"/>
+          </a:p>
+        </p:txBody>
+      </p:sp>
+      <p:sp>
+        <p:nvSpPr>
+          <p:cNvPr id="9" name="WS2 text"/>
+          <p:cNvSpPr txBox="1"/>
+          <p:nvPr/>
+        </p:nvSpPr>
+        <p:spPr>
+          <a:xfrm>
+            <a:off x="4564228" y="2221992"/>
+            <a:ext cx="3063240" cy="2743200"/>
+          </a:xfrm>
+          <a:prstGeom prst="rect">
+            <a:avLst/>
+          </a:prstGeom>
+          <a:noFill/>
+          <a:ln/>
+        </p:spPr>
+        <p:txBody>
+          <a:bodyPr wrap="square" lIns="0" tIns="0" rIns="0" bIns="0" rtlCol="0" anchor="t"/>
+          <a:lstStyle/>
+          <a:p>
+            <a:pPr indent="0" marL="0">
+              <a:spcAft>
+                <a:spcPts val="400"/>
+              </a:spcAft>
+              <a:buNone/>
+            </a:pPr>
+            <a:r>
+              <a:rPr lang="en-US" sz="1100" b="1" dirty="0">
+                <a:solidFill>
+                  <a:schemeClr val="accent2"/>
+                </a:solidFill>
+              </a:rPr>
+              <a:t>WORKSTREAM 2</a:t>
+            </a:r>
+            <a:endParaRPr lang="en-US" sz="1100" dirty="0"/>
+          </a:p>
+          <a:p>
+            <a:pPr indent="0" marL="0">
+              <a:spcAft>
+                <a:spcPts val="1000"/>
+              </a:spcAft>
+              <a:buNone/>
+            </a:pPr>
+            <a:r>
+              <a:rPr lang="en-US" sz="1800" b="1" dirty="0">
+                <a:solidFill>
+                  <a:schemeClr val="tx1"/>
+                </a:solidFill>
+              </a:rPr>
+              <a:t>Renewables-Specific Electrical Engineering</a:t>
+            </a:r>
+            <a:endParaRPr lang="en-US" sz="1100" dirty="0"/>
+          </a:p>
+          <a:p>
+            <a:pPr indent="0" marL="0">
+              <a:buNone/>
+            </a:pPr>
+            <a:r>
+              <a:rPr lang="en-US" sz="1400" b="1" dirty="0">
+                <a:solidFill>
+                  <a:schemeClr val="tx1"/>
+                </a:solidFill>
+              </a:rPr>
+              <a:t>Lead: </a:t>
+            </a:r>
+            <a:pPr indent="0" marL="0">
+              <a:spcAft>
+                <a:spcPts val="1000"/>
+              </a:spcAft>
+              <a:buNone/>
+            </a:pPr>
+            <a:r>
+              <a:rPr lang="en-US" sz="1400" dirty="0">
+                <a:solidFill>
+                  <a:schemeClr val="tx1"/>
+                </a:solidFill>
+              </a:rPr>
+              <a:t>Halem and team</a:t>
+            </a:r>
+            <a:endParaRPr lang="en-US" sz="1100" dirty="0"/>
+          </a:p>
+          <a:p>
+            <a:pPr indent="0" marL="0">
+              <a:spcAft>
+                <a:spcPts val="1000"/>
+              </a:spcAft>
+              <a:buNone/>
+            </a:pPr>
+            <a:r>
+              <a:rPr lang="en-US" sz="1300" dirty="0">
+                <a:solidFill>
+                  <a:schemeClr val="tx2"/>
+                </a:solidFill>
+              </a:rPr>
+              <a:t>Capability requirements specific to Renewables technologies: Solar, Energy Storage and Wind.</a:t>
+            </a:r>
+            <a:endParaRPr lang="en-US" sz="1100" dirty="0"/>
+          </a:p>
+          <a:p>
+            <a:pPr indent="0" marL="0">
+              <a:buNone/>
+            </a:pPr>
+            <a:r>
+              <a:rPr lang="en-US" sz="1300" i="1" dirty="0">
+                <a:solidFill>
+                  <a:schemeClr val="tx1"/>
+                </a:solidFill>
+              </a:rPr>
+              <a:t>Focus on renewables-specific capability requirements.</a:t>
+            </a:r>
+            <a:endParaRPr lang="en-US" sz="1100" dirty="0"/>
+          </a:p>
+        </p:txBody>
+      </p:sp>
+      <p:sp>
+        <p:nvSpPr>
+          <p:cNvPr id="10" name="WS3 card"/>
+          <p:cNvSpPr/>
+          <p:nvPr/>
+        </p:nvSpPr>
+        <p:spPr>
+          <a:xfrm>
+            <a:off x="8121244" y="1600200"/>
+            <a:ext cx="3520440" cy="3520440"/>
+          </a:xfrm>
+          <a:prstGeom prst="roundRect">
+            <a:avLst>
+              <a:gd name="adj" fmla="val 3896"/>
+            </a:avLst>
+          </a:prstGeom>
+          <a:solidFill>
             <a:schemeClr val="bg1"/>
           </a:solidFill>
-          <a:ln w="19050">
+          <a:ln w="25400">
             <a:solidFill>
-              <a:schemeClr val="accent1"/>
+              <a:schemeClr val="accent3"/>
             </a:solidFill>
             <a:prstDash val="solid"/>
           </a:ln>
@@ -1354,14 +1607,54 @@
       </p:sp>
       <p:sp>
         <p:nvSpPr>
-          <p:cNvPr id="10" name="Card 2 text"/>
+          <p:cNvPr id="11" name="WS3 tag"/>
+          <p:cNvSpPr/>
+          <p:nvPr/>
+        </p:nvSpPr>
+        <p:spPr>
+          <a:xfrm>
+            <a:off x="8349844" y="1828800"/>
+            <a:ext cx="1325880" cy="256032"/>
+          </a:xfrm>
+          <a:prstGeom prst="roundRect">
+            <a:avLst>
+              <a:gd name="adj" fmla="val 46429"/>
+            </a:avLst>
+          </a:prstGeom>
+          <a:solidFill>
+            <a:schemeClr val="bg2"/>
+          </a:solidFill>
+          <a:ln/>
+        </p:spPr>
+        <p:txBody>
+          <a:bodyPr wrap="square" lIns="0" tIns="0" rIns="0" bIns="0" rtlCol="0" anchor="ctr"/>
+          <a:lstStyle/>
+          <a:p>
+            <a:pPr algn="ctr" indent="0" marL="0">
+              <a:buNone/>
+            </a:pPr>
+            <a:r>
+              <a:rPr lang="en-US" sz="1000" b="1" dirty="0">
+                <a:solidFill>
+                  <a:schemeClr val="accent4"/>
+                </a:solidFill>
+              </a:rPr>
+              <a:t>IN PARALLEL</a:t>
+            </a:r>
+            <a:endParaRPr lang="en-US" sz="1000" dirty="0"/>
+          </a:p>
+        </p:txBody>
+      </p:sp>
+      <p:sp>
+        <p:nvSpPr>
+          <p:cNvPr id="12" name="WS3 text"/>
           <p:cNvSpPr txBox="1"/>
           <p:nvPr/>
         </p:nvSpPr>
         <p:spPr>
           <a:xfrm>
-            <a:off x="2547976" y="1828800"/>
-            <a:ext cx="1444752" cy="2057400"/>
+            <a:off x="8349844" y="2221992"/>
+            <a:ext cx="3063240" cy="2743200"/>
           </a:xfrm>
           <a:prstGeom prst="rect">
             <a:avLst/>
@@ -1380,977 +1673,139 @@
               <a:buNone/>
             </a:pPr>
             <a:r>
-              <a:rPr lang="en-US" sz="1000" b="1" dirty="0">
-                <a:solidFill>
-                  <a:schemeClr val="accent1"/>
-                </a:solidFill>
-              </a:rPr>
-              <a:t>STEP 2</a:t>
-            </a:r>
-            <a:endParaRPr lang="en-US" sz="1000" dirty="0"/>
+              <a:rPr lang="en-US" sz="1100" b="1" dirty="0">
+                <a:solidFill>
+                  <a:schemeClr val="accent3"/>
+                </a:solidFill>
+              </a:rPr>
+              <a:t>WORKSTREAM 3</a:t>
+            </a:r>
+            <a:endParaRPr lang="en-US" sz="1100" dirty="0"/>
           </a:p>
           <a:p>
             <a:pPr indent="0" marL="0">
               <a:spcAft>
-                <a:spcPts val="600"/>
+                <a:spcPts val="1000"/>
               </a:spcAft>
               <a:buNone/>
             </a:pPr>
             <a:r>
-              <a:rPr lang="en-US" sz="1300" b="1" dirty="0">
+              <a:rPr lang="en-US" sz="1800" b="1" dirty="0">
                 <a:solidFill>
                   <a:schemeClr val="tx1"/>
                 </a:solidFill>
               </a:rPr>
-              <a:t>Customise ruler to Gentari's needs</a:t>
-            </a:r>
-            <a:endParaRPr lang="en-US" sz="1000" dirty="0"/>
-          </a:p>
-          <a:p>
-            <a:pPr indent="0" marL="0">
-              <a:buNone/>
-            </a:pPr>
-            <a:r>
-              <a:rPr lang="en-US" sz="1100" dirty="0">
+              <a:t>Job Competency Profile (JCP) / Job Family (JF)</a:t>
+            </a:r>
+            <a:endParaRPr lang="en-US" sz="1100" dirty="0"/>
+          </a:p>
+          <a:p>
+            <a:pPr indent="0" marL="0">
+              <a:buNone/>
+            </a:pPr>
+            <a:r>
+              <a:rPr lang="en-US" sz="1400" b="1" dirty="0">
+                <a:solidFill>
+                  <a:schemeClr val="tx1"/>
+                </a:solidFill>
+              </a:rPr>
+              <a:t>Lead: </a:t>
+            </a:r>
+            <a:pPr indent="0" marL="0">
+              <a:spcAft>
+                <a:spcPts val="1000"/>
+              </a:spcAft>
+              <a:buNone/>
+            </a:pPr>
+            <a:r>
+              <a:rPr lang="en-US" sz="1400" dirty="0">
+                <a:solidFill>
+                  <a:schemeClr val="tx1"/>
+                </a:solidFill>
+              </a:rPr>
+              <a:t>Nizam</a:t>
+            </a:r>
+            <a:endParaRPr lang="en-US" sz="1100" dirty="0"/>
+          </a:p>
+          <a:p>
+            <a:pPr indent="0" marL="0">
+              <a:spcAft>
+                <a:spcPts val="1000"/>
+              </a:spcAft>
+              <a:buNone/>
+            </a:pPr>
+            <a:r>
+              <a:rPr lang="en-US" sz="1300" dirty="0">
                 <a:solidFill>
                   <a:schemeClr val="tx2"/>
                 </a:solidFill>
               </a:rPr>
-              <a:t>Map the ruler to Gentari electrical roles, levels and business requirements.</a:t>
-            </a:r>
-            <a:endParaRPr lang="en-US" sz="1000" dirty="0"/>
-          </a:p>
-        </p:txBody>
-      </p:sp>
-      <p:sp>
-        <p:nvSpPr>
-          <p:cNvPr id="11" name="Status 2"/>
+              <a:t>Works alongside Workstreams 1 and 2 so the JCP stays aligned with the overall capability framework.</a:t>
+            </a:r>
+            <a:endParaRPr lang="en-US" sz="1100" dirty="0"/>
+          </a:p>
+          <a:p>
+            <a:pPr indent="0" marL="0">
+              <a:buNone/>
+            </a:pPr>
+            <a:r>
+              <a:rPr lang="en-US" sz="1300" i="1" dirty="0">
+                <a:solidFill>
+                  <a:schemeClr val="tx1"/>
+                </a:solidFill>
+              </a:rPr>
+              <a:t>Checkpoint alignment at each workstream update.</a:t>
+            </a:r>
+            <a:endParaRPr lang="en-US" sz="1100" dirty="0"/>
+          </a:p>
+        </p:txBody>
+      </p:sp>
+      <p:sp>
+        <p:nvSpPr>
+          <p:cNvPr id="13" name="Next update callout"/>
           <p:cNvSpPr/>
           <p:nvPr/>
         </p:nvSpPr>
         <p:spPr>
           <a:xfrm>
-            <a:off x="2767432" y="4069080"/>
-            <a:ext cx="1005840" cy="274320"/>
+            <a:off x="550012" y="5440680"/>
+            <a:ext cx="11091672" cy="685800"/>
           </a:xfrm>
           <a:prstGeom prst="roundRect">
             <a:avLst>
-              <a:gd name="adj" fmla="val 46667"/>
+              <a:gd name="adj" fmla="val 13333"/>
             </a:avLst>
           </a:prstGeom>
           <a:solidFill>
-            <a:schemeClr val="bg2"/>
-          </a:solidFill>
-          <a:ln/>
-        </p:spPr>
-        <p:txBody>
-          <a:bodyPr wrap="square" lIns="0" tIns="0" rIns="0" bIns="0" rtlCol="0" anchor="ctr"/>
-          <a:lstStyle/>
-          <a:p>
-            <a:pPr algn="ctr" indent="0" marL="0">
-              <a:buNone/>
-            </a:pPr>
-            <a:r>
-              <a:rPr lang="en-US" sz="1100" b="1" dirty="0">
-                <a:solidFill>
-                  <a:schemeClr val="accent4"/>
-                </a:solidFill>
-              </a:rPr>
-              <a:t>Upcoming</a:t>
-            </a:r>
-            <a:endParaRPr lang="en-US" sz="1100" dirty="0"/>
-          </a:p>
-        </p:txBody>
-      </p:sp>
-      <p:sp>
-        <p:nvSpPr>
-          <p:cNvPr id="12" name="Date 2"/>
-          <p:cNvSpPr txBox="1"/>
-          <p:nvPr/>
-        </p:nvSpPr>
-        <p:spPr>
-          <a:xfrm>
-            <a:off x="2383384" y="4663440"/>
-            <a:ext cx="1773936" cy="457200"/>
-          </a:xfrm>
-          <a:prstGeom prst="rect">
-            <a:avLst/>
-          </a:prstGeom>
-          <a:noFill/>
-          <a:ln/>
-        </p:spPr>
-        <p:txBody>
-          <a:bodyPr wrap="square" lIns="0" tIns="0" rIns="0" bIns="0" rtlCol="0" anchor="t"/>
-          <a:lstStyle/>
-          <a:p>
-            <a:pPr algn="ctr" indent="0" marL="0">
-              <a:buNone/>
-            </a:pPr>
-            <a:r>
-              <a:rPr lang="en-US" sz="1200" b="1" dirty="0">
+            <a:schemeClr val="accent6"/>
+          </a:solidFill>
+          <a:ln/>
+        </p:spPr>
+        <p:txBody>
+          <a:bodyPr wrap="square" lIns="177800" tIns="177800" rIns="177800" bIns="177800" rtlCol="0" anchor="ctr"/>
+          <a:lstStyle/>
+          <a:p>
+            <a:pPr indent="0" marL="0">
+              <a:buNone/>
+            </a:pPr>
+            <a:r>
+              <a:rPr lang="en-US" sz="1400" b="1" dirty="0">
                 <a:solidFill>
                   <a:schemeClr val="tx1"/>
                 </a:solidFill>
-                <a:highlight>
-                  <a:srgbClr val="FFF200"/>
-                </a:highlight>
-              </a:rPr>
-              <a:t>9 Nov – 4 Dec</a:t>
-            </a:r>
-            <a:endParaRPr lang="en-US" sz="1200" dirty="0"/>
-          </a:p>
-        </p:txBody>
-      </p:sp>
-      <p:sp>
-        <p:nvSpPr>
-          <p:cNvPr id="13" name="Arrow 2"/>
-          <p:cNvSpPr/>
-          <p:nvPr/>
-        </p:nvSpPr>
-        <p:spPr>
-          <a:xfrm>
-            <a:off x="4129888" y="3017520"/>
-            <a:ext cx="164592" cy="182880"/>
-          </a:xfrm>
-          <a:prstGeom prst="rightArrow">
-            <a:avLst/>
-          </a:prstGeom>
-          <a:solidFill>
-            <a:schemeClr val="accent4"/>
-          </a:solidFill>
-          <a:ln w="12700">
-            <a:solidFill>
-              <a:schemeClr val="accent4"/>
-            </a:solidFill>
-            <a:prstDash val="solid"/>
-          </a:ln>
-        </p:spPr>
-      </p:sp>
-      <p:sp>
-        <p:nvSpPr>
-          <p:cNvPr id="14" name="Card 3"/>
-          <p:cNvSpPr/>
-          <p:nvPr/>
-        </p:nvSpPr>
-        <p:spPr>
-          <a:xfrm>
-            <a:off x="4321912" y="1691640"/>
-            <a:ext cx="1664208" cy="2834640"/>
-          </a:xfrm>
-          <a:prstGeom prst="roundRect">
-            <a:avLst>
-              <a:gd name="adj" fmla="val 9890"/>
-            </a:avLst>
-          </a:prstGeom>
-          <a:solidFill>
-            <a:schemeClr val="bg1"/>
-          </a:solidFill>
-          <a:ln w="19050">
-            <a:solidFill>
-              <a:schemeClr val="accent1"/>
-            </a:solidFill>
-            <a:prstDash val="solid"/>
-          </a:ln>
-        </p:spPr>
-      </p:sp>
-      <p:sp>
-        <p:nvSpPr>
-          <p:cNvPr id="15" name="Card 3 text"/>
-          <p:cNvSpPr txBox="1"/>
-          <p:nvPr/>
-        </p:nvSpPr>
-        <p:spPr>
-          <a:xfrm>
-            <a:off x="4431640" y="1828800"/>
-            <a:ext cx="1444752" cy="2057400"/>
-          </a:xfrm>
-          <a:prstGeom prst="rect">
-            <a:avLst/>
-          </a:prstGeom>
-          <a:noFill/>
-          <a:ln/>
-        </p:spPr>
-        <p:txBody>
-          <a:bodyPr wrap="square" lIns="0" tIns="0" rIns="0" bIns="0" rtlCol="0" anchor="t"/>
-          <a:lstStyle/>
-          <a:p>
-            <a:pPr indent="0" marL="0">
-              <a:spcAft>
-                <a:spcPts val="400"/>
-              </a:spcAft>
-              <a:buNone/>
-            </a:pPr>
-            <a:r>
-              <a:rPr lang="en-US" sz="1000" b="1" dirty="0">
-                <a:solidFill>
-                  <a:schemeClr val="accent1"/>
-                </a:solidFill>
-              </a:rPr>
-              <a:t>STEP 3</a:t>
-            </a:r>
-            <a:endParaRPr lang="en-US" sz="1000" dirty="0"/>
-          </a:p>
-          <a:p>
-            <a:pPr indent="0" marL="0">
-              <a:spcAft>
-                <a:spcPts val="600"/>
-              </a:spcAft>
-              <a:buNone/>
-            </a:pPr>
-            <a:r>
-              <a:rPr lang="en-US" sz="1300" b="1" dirty="0">
+              </a:rPr>
+              <a:t>Next progress update: </a:t>
+            </a:r>
+            <a:pPr indent="0" marL="0">
+              <a:buNone/>
+            </a:pPr>
+            <a:r>
+              <a:rPr lang="en-US" sz="1400" dirty="0">
                 <a:solidFill>
                   <a:schemeClr val="tx1"/>
                 </a:solidFill>
               </a:rPr>
-              <a:t>Review &amp; refine the customised ruler</a:t>
-            </a:r>
-            <a:endParaRPr lang="en-US" sz="1000" dirty="0"/>
-          </a:p>
-          <a:p>
-            <a:pPr indent="0" marL="0">
-              <a:buNone/>
-            </a:pPr>
-            <a:r>
-              <a:rPr lang="en-US" sz="1100" dirty="0">
-                <a:solidFill>
-                  <a:schemeClr val="tx2"/>
-                </a:solidFill>
-              </a:rPr>
-              <a:t>With PETRONAS specialists and internal focal; finalise the pilot version.</a:t>
-            </a:r>
-            <a:endParaRPr lang="en-US" sz="1000" dirty="0"/>
-          </a:p>
-        </p:txBody>
-      </p:sp>
-      <p:sp>
-        <p:nvSpPr>
-          <p:cNvPr id="16" name="Status 3"/>
-          <p:cNvSpPr/>
-          <p:nvPr/>
-        </p:nvSpPr>
-        <p:spPr>
-          <a:xfrm>
-            <a:off x="4651096" y="4069080"/>
-            <a:ext cx="1005840" cy="274320"/>
-          </a:xfrm>
-          <a:prstGeom prst="roundRect">
-            <a:avLst>
-              <a:gd name="adj" fmla="val 46667"/>
-            </a:avLst>
-          </a:prstGeom>
-          <a:solidFill>
-            <a:schemeClr val="bg2"/>
-          </a:solidFill>
-          <a:ln/>
-        </p:spPr>
-        <p:txBody>
-          <a:bodyPr wrap="square" lIns="0" tIns="0" rIns="0" bIns="0" rtlCol="0" anchor="ctr"/>
-          <a:lstStyle/>
-          <a:p>
-            <a:pPr algn="ctr" indent="0" marL="0">
-              <a:buNone/>
-            </a:pPr>
-            <a:r>
-              <a:rPr lang="en-US" sz="1100" b="1" dirty="0">
-                <a:solidFill>
-                  <a:schemeClr val="accent4"/>
-                </a:solidFill>
-              </a:rPr>
-              <a:t>Upcoming</a:t>
-            </a:r>
-            <a:endParaRPr lang="en-US" sz="1100" dirty="0"/>
-          </a:p>
-        </p:txBody>
-      </p:sp>
-      <p:sp>
-        <p:nvSpPr>
-          <p:cNvPr id="17" name="Date 3"/>
-          <p:cNvSpPr txBox="1"/>
-          <p:nvPr/>
-        </p:nvSpPr>
-        <p:spPr>
-          <a:xfrm>
-            <a:off x="4267048" y="4663440"/>
-            <a:ext cx="1773936" cy="457200"/>
-          </a:xfrm>
-          <a:prstGeom prst="rect">
-            <a:avLst/>
-          </a:prstGeom>
-          <a:noFill/>
-          <a:ln/>
-        </p:spPr>
-        <p:txBody>
-          <a:bodyPr wrap="square" lIns="0" tIns="0" rIns="0" bIns="0" rtlCol="0" anchor="t"/>
-          <a:lstStyle/>
-          <a:p>
-            <a:pPr algn="ctr" indent="0" marL="0">
-              <a:buNone/>
-            </a:pPr>
-            <a:r>
-              <a:rPr lang="en-US" sz="1200" b="1" dirty="0">
-                <a:solidFill>
-                  <a:schemeClr val="tx1"/>
-                </a:solidFill>
-                <a:highlight>
-                  <a:srgbClr val="FFF200"/>
-                </a:highlight>
-              </a:rPr>
-              <a:t>7 Dec – 15 Jan</a:t>
-            </a:r>
-            <a:endParaRPr lang="en-US" sz="1200" dirty="0"/>
-          </a:p>
-        </p:txBody>
-      </p:sp>
-      <p:sp>
-        <p:nvSpPr>
-          <p:cNvPr id="18" name="Arrow 3"/>
-          <p:cNvSpPr/>
-          <p:nvPr/>
-        </p:nvSpPr>
-        <p:spPr>
-          <a:xfrm>
-            <a:off x="6013552" y="3017520"/>
-            <a:ext cx="164592" cy="182880"/>
-          </a:xfrm>
-          <a:prstGeom prst="rightArrow">
-            <a:avLst/>
-          </a:prstGeom>
-          <a:solidFill>
-            <a:schemeClr val="accent4"/>
-          </a:solidFill>
-          <a:ln w="12700">
-            <a:solidFill>
-              <a:schemeClr val="accent4"/>
-            </a:solidFill>
-            <a:prstDash val="solid"/>
-          </a:ln>
-        </p:spPr>
-      </p:sp>
-      <p:sp>
-        <p:nvSpPr>
-          <p:cNvPr id="19" name="Card 4"/>
-          <p:cNvSpPr/>
-          <p:nvPr/>
-        </p:nvSpPr>
-        <p:spPr>
-          <a:xfrm>
-            <a:off x="6205576" y="1691640"/>
-            <a:ext cx="1664208" cy="2834640"/>
-          </a:xfrm>
-          <a:prstGeom prst="roundRect">
-            <a:avLst>
-              <a:gd name="adj" fmla="val 9890"/>
-            </a:avLst>
-          </a:prstGeom>
-          <a:solidFill>
-            <a:schemeClr val="bg1"/>
-          </a:solidFill>
-          <a:ln w="19050">
-            <a:solidFill>
-              <a:schemeClr val="accent1"/>
-            </a:solidFill>
-            <a:prstDash val="solid"/>
-          </a:ln>
-        </p:spPr>
-      </p:sp>
-      <p:sp>
-        <p:nvSpPr>
-          <p:cNvPr id="20" name="Card 4 text"/>
-          <p:cNvSpPr txBox="1"/>
-          <p:nvPr/>
-        </p:nvSpPr>
-        <p:spPr>
-          <a:xfrm>
-            <a:off x="6315304" y="1828800"/>
-            <a:ext cx="1444752" cy="2057400"/>
-          </a:xfrm>
-          <a:prstGeom prst="rect">
-            <a:avLst/>
-          </a:prstGeom>
-          <a:noFill/>
-          <a:ln/>
-        </p:spPr>
-        <p:txBody>
-          <a:bodyPr wrap="square" lIns="0" tIns="0" rIns="0" bIns="0" rtlCol="0" anchor="t"/>
-          <a:lstStyle/>
-          <a:p>
-            <a:pPr indent="0" marL="0">
-              <a:spcAft>
-                <a:spcPts val="400"/>
-              </a:spcAft>
-              <a:buNone/>
-            </a:pPr>
-            <a:r>
-              <a:rPr lang="en-US" sz="1000" b="1" dirty="0">
-                <a:solidFill>
-                  <a:schemeClr val="accent1"/>
-                </a:solidFill>
-              </a:rPr>
-              <a:t>STEP 4</a:t>
-            </a:r>
-            <a:endParaRPr lang="en-US" sz="1000" dirty="0"/>
-          </a:p>
-          <a:p>
-            <a:pPr indent="0" marL="0">
-              <a:spcAft>
-                <a:spcPts val="600"/>
-              </a:spcAft>
-              <a:buNone/>
-            </a:pPr>
-            <a:r>
-              <a:rPr lang="en-US" sz="1300" b="1" dirty="0">
-                <a:solidFill>
-                  <a:schemeClr val="tx1"/>
-                </a:solidFill>
-              </a:rPr>
-              <a:t>Apply ruler to Electrical pilot group</a:t>
-            </a:r>
-            <a:endParaRPr lang="en-US" sz="1000" dirty="0"/>
-          </a:p>
-          <a:p>
-            <a:pPr indent="0" marL="0">
-              <a:buNone/>
-            </a:pPr>
-            <a:r>
-              <a:rPr lang="en-US" sz="1100" dirty="0">
-                <a:solidFill>
-                  <a:schemeClr val="tx2"/>
-                </a:solidFill>
-              </a:rPr>
-              <a:t>Assess pilot participants and identify capability gaps.</a:t>
-            </a:r>
-            <a:endParaRPr lang="en-US" sz="1000" dirty="0"/>
-          </a:p>
-        </p:txBody>
-      </p:sp>
-      <p:sp>
-        <p:nvSpPr>
-          <p:cNvPr id="21" name="Status 4"/>
-          <p:cNvSpPr/>
-          <p:nvPr/>
-        </p:nvSpPr>
-        <p:spPr>
-          <a:xfrm>
-            <a:off x="6534760" y="4069080"/>
-            <a:ext cx="1005840" cy="274320"/>
-          </a:xfrm>
-          <a:prstGeom prst="roundRect">
-            <a:avLst>
-              <a:gd name="adj" fmla="val 46667"/>
-            </a:avLst>
-          </a:prstGeom>
-          <a:solidFill>
-            <a:schemeClr val="bg2"/>
-          </a:solidFill>
-          <a:ln/>
-        </p:spPr>
-        <p:txBody>
-          <a:bodyPr wrap="square" lIns="0" tIns="0" rIns="0" bIns="0" rtlCol="0" anchor="ctr"/>
-          <a:lstStyle/>
-          <a:p>
-            <a:pPr algn="ctr" indent="0" marL="0">
-              <a:buNone/>
-            </a:pPr>
-            <a:r>
-              <a:rPr lang="en-US" sz="1100" b="1" dirty="0">
-                <a:solidFill>
-                  <a:schemeClr val="accent4"/>
-                </a:solidFill>
-              </a:rPr>
-              <a:t>Upcoming</a:t>
-            </a:r>
-            <a:endParaRPr lang="en-US" sz="1100" dirty="0"/>
-          </a:p>
-        </p:txBody>
-      </p:sp>
-      <p:sp>
-        <p:nvSpPr>
-          <p:cNvPr id="22" name="Date 4"/>
-          <p:cNvSpPr txBox="1"/>
-          <p:nvPr/>
-        </p:nvSpPr>
-        <p:spPr>
-          <a:xfrm>
-            <a:off x="6150712" y="4663440"/>
-            <a:ext cx="1773936" cy="457200"/>
-          </a:xfrm>
-          <a:prstGeom prst="rect">
-            <a:avLst/>
-          </a:prstGeom>
-          <a:noFill/>
-          <a:ln/>
-        </p:spPr>
-        <p:txBody>
-          <a:bodyPr wrap="square" lIns="0" tIns="0" rIns="0" bIns="0" rtlCol="0" anchor="t"/>
-          <a:lstStyle/>
-          <a:p>
-            <a:pPr algn="ctr" indent="0" marL="0">
-              <a:buNone/>
-            </a:pPr>
-            <a:r>
-              <a:rPr lang="en-US" sz="1200" b="1" dirty="0">
-                <a:solidFill>
-                  <a:schemeClr val="tx1"/>
-                </a:solidFill>
-                <a:highlight>
-                  <a:srgbClr val="FFF200"/>
-                </a:highlight>
-              </a:rPr>
-              <a:t>18 Jan – 26 Feb</a:t>
-            </a:r>
-            <a:endParaRPr lang="en-US" sz="1200" dirty="0"/>
-          </a:p>
-        </p:txBody>
-      </p:sp>
-      <p:sp>
-        <p:nvSpPr>
-          <p:cNvPr id="23" name="Arrow 4"/>
-          <p:cNvSpPr/>
-          <p:nvPr/>
-        </p:nvSpPr>
-        <p:spPr>
-          <a:xfrm>
-            <a:off x="7897216" y="3017520"/>
-            <a:ext cx="164592" cy="182880"/>
-          </a:xfrm>
-          <a:prstGeom prst="rightArrow">
-            <a:avLst/>
-          </a:prstGeom>
-          <a:solidFill>
-            <a:schemeClr val="accent4"/>
-          </a:solidFill>
-          <a:ln w="12700">
-            <a:solidFill>
-              <a:schemeClr val="accent4"/>
-            </a:solidFill>
-            <a:prstDash val="solid"/>
-          </a:ln>
-        </p:spPr>
-      </p:sp>
-      <p:sp>
-        <p:nvSpPr>
-          <p:cNvPr id="24" name="Card 5"/>
-          <p:cNvSpPr/>
-          <p:nvPr/>
-        </p:nvSpPr>
-        <p:spPr>
-          <a:xfrm>
-            <a:off x="8089240" y="1691640"/>
-            <a:ext cx="1664208" cy="2834640"/>
-          </a:xfrm>
-          <a:prstGeom prst="roundRect">
-            <a:avLst>
-              <a:gd name="adj" fmla="val 9890"/>
-            </a:avLst>
-          </a:prstGeom>
-          <a:solidFill>
-            <a:schemeClr val="bg1"/>
-          </a:solidFill>
-          <a:ln w="19050">
-            <a:solidFill>
-              <a:schemeClr val="accent1"/>
-            </a:solidFill>
-            <a:prstDash val="solid"/>
-          </a:ln>
-        </p:spPr>
-      </p:sp>
-      <p:sp>
-        <p:nvSpPr>
-          <p:cNvPr id="25" name="Card 5 text"/>
-          <p:cNvSpPr txBox="1"/>
-          <p:nvPr/>
-        </p:nvSpPr>
-        <p:spPr>
-          <a:xfrm>
-            <a:off x="8198968" y="1828800"/>
-            <a:ext cx="1444752" cy="2057400"/>
-          </a:xfrm>
-          <a:prstGeom prst="rect">
-            <a:avLst/>
-          </a:prstGeom>
-          <a:noFill/>
-          <a:ln/>
-        </p:spPr>
-        <p:txBody>
-          <a:bodyPr wrap="square" lIns="0" tIns="0" rIns="0" bIns="0" rtlCol="0" anchor="t"/>
-          <a:lstStyle/>
-          <a:p>
-            <a:pPr indent="0" marL="0">
-              <a:spcAft>
-                <a:spcPts val="400"/>
-              </a:spcAft>
-              <a:buNone/>
-            </a:pPr>
-            <a:r>
-              <a:rPr lang="en-US" sz="1000" b="1" dirty="0">
-                <a:solidFill>
-                  <a:schemeClr val="accent1"/>
-                </a:solidFill>
-              </a:rPr>
-              <a:t>STEP 5</a:t>
-            </a:r>
-            <a:endParaRPr lang="en-US" sz="1000" dirty="0"/>
-          </a:p>
-          <a:p>
-            <a:pPr indent="0" marL="0">
-              <a:spcAft>
-                <a:spcPts val="600"/>
-              </a:spcAft>
-              <a:buNone/>
-            </a:pPr>
-            <a:r>
-              <a:rPr lang="en-US" sz="1300" b="1" dirty="0">
-                <a:solidFill>
-                  <a:schemeClr val="tx1"/>
-                </a:solidFill>
-              </a:rPr>
-              <a:t>Link gaps to Individual Development Plans</a:t>
-            </a:r>
-            <a:endParaRPr lang="en-US" sz="1000" dirty="0"/>
-          </a:p>
-          <a:p>
-            <a:pPr indent="0" marL="0">
-              <a:buNone/>
-            </a:pPr>
-            <a:r>
-              <a:rPr lang="en-US" sz="1100" dirty="0">
-                <a:solidFill>
-                  <a:schemeClr val="tx2"/>
-                </a:solidFill>
-              </a:rPr>
-              <a:t>Translate identified gaps into IDP actions with managers.</a:t>
-            </a:r>
-            <a:endParaRPr lang="en-US" sz="1000" dirty="0"/>
-          </a:p>
-        </p:txBody>
-      </p:sp>
-      <p:sp>
-        <p:nvSpPr>
-          <p:cNvPr id="26" name="Status 5"/>
-          <p:cNvSpPr/>
-          <p:nvPr/>
-        </p:nvSpPr>
-        <p:spPr>
-          <a:xfrm>
-            <a:off x="8418424" y="4069080"/>
-            <a:ext cx="1005840" cy="274320"/>
-          </a:xfrm>
-          <a:prstGeom prst="roundRect">
-            <a:avLst>
-              <a:gd name="adj" fmla="val 46667"/>
-            </a:avLst>
-          </a:prstGeom>
-          <a:solidFill>
-            <a:schemeClr val="bg2"/>
-          </a:solidFill>
-          <a:ln/>
-        </p:spPr>
-        <p:txBody>
-          <a:bodyPr wrap="square" lIns="0" tIns="0" rIns="0" bIns="0" rtlCol="0" anchor="ctr"/>
-          <a:lstStyle/>
-          <a:p>
-            <a:pPr algn="ctr" indent="0" marL="0">
-              <a:buNone/>
-            </a:pPr>
-            <a:r>
-              <a:rPr lang="en-US" sz="1100" b="1" dirty="0">
-                <a:solidFill>
-                  <a:schemeClr val="accent4"/>
-                </a:solidFill>
-              </a:rPr>
-              <a:t>Upcoming</a:t>
-            </a:r>
-            <a:endParaRPr lang="en-US" sz="1100" dirty="0"/>
-          </a:p>
-        </p:txBody>
-      </p:sp>
-      <p:sp>
-        <p:nvSpPr>
-          <p:cNvPr id="27" name="Date 5"/>
-          <p:cNvSpPr txBox="1"/>
-          <p:nvPr/>
-        </p:nvSpPr>
-        <p:spPr>
-          <a:xfrm>
-            <a:off x="8034376" y="4663440"/>
-            <a:ext cx="1773936" cy="457200"/>
-          </a:xfrm>
-          <a:prstGeom prst="rect">
-            <a:avLst/>
-          </a:prstGeom>
-          <a:noFill/>
-          <a:ln/>
-        </p:spPr>
-        <p:txBody>
-          <a:bodyPr wrap="square" lIns="0" tIns="0" rIns="0" bIns="0" rtlCol="0" anchor="t"/>
-          <a:lstStyle/>
-          <a:p>
-            <a:pPr algn="ctr" indent="0" marL="0">
-              <a:buNone/>
-            </a:pPr>
-            <a:r>
-              <a:rPr lang="en-US" sz="1200" b="1" dirty="0">
-                <a:solidFill>
-                  <a:schemeClr val="tx1"/>
-                </a:solidFill>
-                <a:highlight>
-                  <a:srgbClr val="FFF200"/>
-                </a:highlight>
-              </a:rPr>
-              <a:t>1 – 26 Mar</a:t>
-            </a:r>
-            <a:endParaRPr lang="en-US" sz="1200" dirty="0"/>
-          </a:p>
-        </p:txBody>
-      </p:sp>
-      <p:sp>
-        <p:nvSpPr>
-          <p:cNvPr id="28" name="Arrow 5"/>
-          <p:cNvSpPr/>
-          <p:nvPr/>
-        </p:nvSpPr>
-        <p:spPr>
-          <a:xfrm>
-            <a:off x="9780880" y="3017520"/>
-            <a:ext cx="164592" cy="182880"/>
-          </a:xfrm>
-          <a:prstGeom prst="rightArrow">
-            <a:avLst/>
-          </a:prstGeom>
-          <a:solidFill>
-            <a:schemeClr val="accent4"/>
-          </a:solidFill>
-          <a:ln w="12700">
-            <a:solidFill>
-              <a:schemeClr val="accent4"/>
-            </a:solidFill>
-            <a:prstDash val="solid"/>
-          </a:ln>
-        </p:spPr>
-      </p:sp>
-      <p:sp>
-        <p:nvSpPr>
-          <p:cNvPr id="29" name="Card 6"/>
-          <p:cNvSpPr/>
-          <p:nvPr/>
-        </p:nvSpPr>
-        <p:spPr>
-          <a:xfrm>
-            <a:off x="9972904" y="1691640"/>
-            <a:ext cx="1664208" cy="2834640"/>
-          </a:xfrm>
-          <a:prstGeom prst="roundRect">
-            <a:avLst>
-              <a:gd name="adj" fmla="val 9890"/>
-            </a:avLst>
-          </a:prstGeom>
-          <a:solidFill>
-            <a:schemeClr val="bg1"/>
-          </a:solidFill>
-          <a:ln w="19050">
-            <a:solidFill>
-              <a:schemeClr val="accent1"/>
-            </a:solidFill>
-            <a:prstDash val="solid"/>
-          </a:ln>
-        </p:spPr>
-      </p:sp>
-      <p:sp>
-        <p:nvSpPr>
-          <p:cNvPr id="30" name="Card 6 text"/>
-          <p:cNvSpPr txBox="1"/>
-          <p:nvPr/>
-        </p:nvSpPr>
-        <p:spPr>
-          <a:xfrm>
-            <a:off x="10082632" y="1828800"/>
-            <a:ext cx="1444752" cy="2057400"/>
-          </a:xfrm>
-          <a:prstGeom prst="rect">
-            <a:avLst/>
-          </a:prstGeom>
-          <a:noFill/>
-          <a:ln/>
-        </p:spPr>
-        <p:txBody>
-          <a:bodyPr wrap="square" lIns="0" tIns="0" rIns="0" bIns="0" rtlCol="0" anchor="t"/>
-          <a:lstStyle/>
-          <a:p>
-            <a:pPr indent="0" marL="0">
-              <a:spcAft>
-                <a:spcPts val="400"/>
-              </a:spcAft>
-              <a:buNone/>
-            </a:pPr>
-            <a:r>
-              <a:rPr lang="en-US" sz="1000" b="1" dirty="0">
-                <a:solidFill>
-                  <a:schemeClr val="accent1"/>
-                </a:solidFill>
-              </a:rPr>
-              <a:t>STEP 6</a:t>
-            </a:r>
-            <a:endParaRPr lang="en-US" sz="1000" dirty="0"/>
-          </a:p>
-          <a:p>
-            <a:pPr indent="0" marL="0">
-              <a:spcAft>
-                <a:spcPts val="600"/>
-              </a:spcAft>
-              <a:buNone/>
-            </a:pPr>
-            <a:r>
-              <a:rPr lang="en-US" sz="1300" b="1" dirty="0">
-                <a:solidFill>
-                  <a:schemeClr val="tx1"/>
-                </a:solidFill>
-              </a:rPr>
-              <a:t>Review pilot outcomes</a:t>
-            </a:r>
-            <a:endParaRPr lang="en-US" sz="1000" dirty="0"/>
-          </a:p>
-          <a:p>
-            <a:pPr indent="0" marL="0">
-              <a:buNone/>
-            </a:pPr>
-            <a:r>
-              <a:rPr lang="en-US" sz="1100" dirty="0">
-                <a:solidFill>
-                  <a:schemeClr val="tx2"/>
-                </a:solidFill>
-              </a:rPr>
-              <a:t>Pilot report and recommendation to SCo on broader adoption.</a:t>
-            </a:r>
-            <a:endParaRPr lang="en-US" sz="1000" dirty="0"/>
-          </a:p>
-        </p:txBody>
-      </p:sp>
-      <p:sp>
-        <p:nvSpPr>
-          <p:cNvPr id="31" name="Status 6"/>
-          <p:cNvSpPr/>
-          <p:nvPr/>
-        </p:nvSpPr>
-        <p:spPr>
-          <a:xfrm>
-            <a:off x="10302088" y="4069080"/>
-            <a:ext cx="1005840" cy="274320"/>
-          </a:xfrm>
-          <a:prstGeom prst="roundRect">
-            <a:avLst>
-              <a:gd name="adj" fmla="val 46667"/>
-            </a:avLst>
-          </a:prstGeom>
-          <a:solidFill>
-            <a:schemeClr val="bg2"/>
-          </a:solidFill>
-          <a:ln/>
-        </p:spPr>
-        <p:txBody>
-          <a:bodyPr wrap="square" lIns="0" tIns="0" rIns="0" bIns="0" rtlCol="0" anchor="ctr"/>
-          <a:lstStyle/>
-          <a:p>
-            <a:pPr algn="ctr" indent="0" marL="0">
-              <a:buNone/>
-            </a:pPr>
-            <a:r>
-              <a:rPr lang="en-US" sz="1100" b="1" dirty="0">
-                <a:solidFill>
-                  <a:schemeClr val="accent4"/>
-                </a:solidFill>
-              </a:rPr>
-              <a:t>Upcoming</a:t>
-            </a:r>
-            <a:endParaRPr lang="en-US" sz="1100" dirty="0"/>
-          </a:p>
-        </p:txBody>
-      </p:sp>
-      <p:sp>
-        <p:nvSpPr>
-          <p:cNvPr id="32" name="Date 6"/>
-          <p:cNvSpPr txBox="1"/>
-          <p:nvPr/>
-        </p:nvSpPr>
-        <p:spPr>
-          <a:xfrm>
-            <a:off x="9918040" y="4663440"/>
-            <a:ext cx="1773936" cy="457200"/>
-          </a:xfrm>
-          <a:prstGeom prst="rect">
-            <a:avLst/>
-          </a:prstGeom>
-          <a:noFill/>
-          <a:ln/>
-        </p:spPr>
-        <p:txBody>
-          <a:bodyPr wrap="square" lIns="0" tIns="0" rIns="0" bIns="0" rtlCol="0" anchor="t"/>
-          <a:lstStyle/>
-          <a:p>
-            <a:pPr algn="ctr" indent="0" marL="0">
-              <a:buNone/>
-            </a:pPr>
-            <a:r>
-              <a:rPr lang="en-US" sz="1200" b="1" dirty="0">
-                <a:solidFill>
-                  <a:schemeClr val="tx1"/>
-                </a:solidFill>
-                <a:highlight>
-                  <a:srgbClr val="FFF200"/>
-                </a:highlight>
-              </a:rPr>
-              <a:t>Apr 2027 (SCo TBC)</a:t>
-            </a:r>
-            <a:endParaRPr lang="en-US" sz="1200" dirty="0"/>
-          </a:p>
-        </p:txBody>
-      </p:sp>
-      <p:sp>
-        <p:nvSpPr>
-          <p:cNvPr id="33" name="Critical path callout"/>
-          <p:cNvSpPr/>
-          <p:nvPr/>
-        </p:nvSpPr>
-        <p:spPr>
-          <a:xfrm>
-            <a:off x="585216" y="5440680"/>
-            <a:ext cx="11018520" cy="731520"/>
-          </a:xfrm>
-          <a:prstGeom prst="roundRect">
-            <a:avLst>
-              <a:gd name="adj" fmla="val 12500"/>
-            </a:avLst>
-          </a:prstGeom>
-          <a:solidFill>
-            <a:schemeClr val="accent6"/>
-          </a:solidFill>
-          <a:ln/>
-        </p:spPr>
-        <p:txBody>
-          <a:bodyPr wrap="square" lIns="177800" tIns="177800" rIns="177800" bIns="177800" rtlCol="0" anchor="ctr"/>
-          <a:lstStyle/>
-          <a:p>
-            <a:pPr indent="0" marL="0">
-              <a:buNone/>
-            </a:pPr>
-            <a:r>
-              <a:rPr lang="en-US" sz="1400" b="1" dirty="0">
-                <a:solidFill>
-                  <a:schemeClr val="tx1"/>
-                </a:solidFill>
-              </a:rPr>
-              <a:t>Critical path: </a:t>
-            </a:r>
-            <a:pPr indent="0" marL="0">
-              <a:buNone/>
-            </a:pPr>
-            <a:r>
-              <a:rPr lang="en-US" sz="1400" dirty="0">
-                <a:solidFill>
-                  <a:schemeClr val="tx1"/>
-                </a:solidFill>
-              </a:rPr>
-              <a:t>Steps 2 to 6 depend on PETRONAS management approval in Step 1. Each week of delay moves every downstream step by a week. Target dates are proposed for SCo discussion.</a:t>
+              <a:t>Thursday 15 Oct 2026. Each workstream shares progress, key developments and any areas requiring further alignment.</a:t>
             </a:r>
             <a:endParaRPr lang="en-US" sz="1400" dirty="0"/>
           </a:p>
@@ -2416,7 +1871,7 @@
                 <a:ea typeface="Arial" pitchFamily="34" charset="-122"/>
                 <a:cs typeface="Arial" pitchFamily="34" charset="-120"/>
               </a:rPr>
-              <a:t>Pilot runs to Apr 2027, gated by PETRONAS approval</a:t>
+              <a:t>Revised timeline: pilot runs to Apr 2027</a:t>
             </a:r>
             <a:endParaRPr lang="en-US" sz="3000" dirty="0"/>
           </a:p>
@@ -2424,14 +1879,50 @@
       </p:sp>
       <p:sp>
         <p:nvSpPr>
-          <p:cNvPr id="3" name="Month Oct"/>
+          <p:cNvPr id="3" name="Subtitle"/>
           <p:cNvSpPr txBox="1"/>
           <p:nvPr/>
         </p:nvSpPr>
         <p:spPr>
           <a:xfrm>
-            <a:off x="3063240" y="1234440"/>
-            <a:ext cx="661862" cy="320040"/>
+            <a:off x="548640" y="1024128"/>
+            <a:ext cx="11091672" cy="320040"/>
+          </a:xfrm>
+          <a:prstGeom prst="rect">
+            <a:avLst/>
+          </a:prstGeom>
+          <a:noFill/>
+          <a:ln/>
+        </p:spPr>
+        <p:txBody>
+          <a:bodyPr wrap="square" lIns="0" tIns="0" rIns="0" bIns="0" rtlCol="0" anchor="ctr"/>
+          <a:lstStyle/>
+          <a:p>
+            <a:pPr indent="0" marL="0">
+              <a:buNone/>
+            </a:pPr>
+            <a:r>
+              <a:rPr lang="en-US" sz="1400" dirty="0">
+                <a:solidFill>
+                  <a:schemeClr val="tx2"/>
+                </a:solidFill>
+              </a:rPr>
+              <a:t>Proposed windows for confirmation at the 15 Oct workstream update  |  Dates after securing the ruler shift with PETRONAS management approval</a:t>
+            </a:r>
+            <a:endParaRPr lang="en-US" sz="1400" dirty="0"/>
+          </a:p>
+        </p:txBody>
+      </p:sp>
+      <p:sp>
+        <p:nvSpPr>
+          <p:cNvPr id="4" name="Month Oct"/>
+          <p:cNvSpPr txBox="1"/>
+          <p:nvPr/>
+        </p:nvSpPr>
+        <p:spPr>
+          <a:xfrm>
+            <a:off x="5349240" y="1463040"/>
+            <a:ext cx="919921" cy="292608"/>
           </a:xfrm>
           <a:prstGeom prst="rect">
             <a:avLst/>
@@ -2462,14 +1953,14 @@
       </p:sp>
       <p:sp>
         <p:nvSpPr>
-          <p:cNvPr id="4" name="Month Nov"/>
+          <p:cNvPr id="5" name="Month Nov"/>
           <p:cNvSpPr txBox="1"/>
           <p:nvPr/>
         </p:nvSpPr>
         <p:spPr>
           <a:xfrm>
-            <a:off x="3725102" y="1234440"/>
-            <a:ext cx="640511" cy="320040"/>
+            <a:off x="6269161" y="1463040"/>
+            <a:ext cx="890246" cy="292608"/>
           </a:xfrm>
           <a:prstGeom prst="rect">
             <a:avLst/>
@@ -2500,14 +1991,14 @@
       </p:sp>
       <p:sp>
         <p:nvSpPr>
-          <p:cNvPr id="5" name="Month Dec"/>
+          <p:cNvPr id="6" name="Month Dec"/>
           <p:cNvSpPr txBox="1"/>
           <p:nvPr/>
         </p:nvSpPr>
         <p:spPr>
           <a:xfrm>
-            <a:off x="4365613" y="1234440"/>
-            <a:ext cx="661862" cy="320040"/>
+            <a:off x="7159407" y="1463040"/>
+            <a:ext cx="919921" cy="292608"/>
           </a:xfrm>
           <a:prstGeom prst="rect">
             <a:avLst/>
@@ -2538,14 +2029,14 @@
       </p:sp>
       <p:sp>
         <p:nvSpPr>
-          <p:cNvPr id="6" name="Month Jan"/>
+          <p:cNvPr id="7" name="Month Jan"/>
           <p:cNvSpPr txBox="1"/>
           <p:nvPr/>
         </p:nvSpPr>
         <p:spPr>
           <a:xfrm>
-            <a:off x="5027475" y="1234440"/>
-            <a:ext cx="661862" cy="320040"/>
+            <a:off x="8079328" y="1463040"/>
+            <a:ext cx="919921" cy="292608"/>
           </a:xfrm>
           <a:prstGeom prst="rect">
             <a:avLst/>
@@ -2576,14 +2067,14 @@
       </p:sp>
       <p:sp>
         <p:nvSpPr>
-          <p:cNvPr id="7" name="Month Feb"/>
+          <p:cNvPr id="8" name="Month Feb"/>
           <p:cNvSpPr txBox="1"/>
           <p:nvPr/>
         </p:nvSpPr>
         <p:spPr>
           <a:xfrm>
-            <a:off x="5689336" y="1234440"/>
-            <a:ext cx="597811" cy="320040"/>
+            <a:off x="8999249" y="1463040"/>
+            <a:ext cx="830896" cy="292608"/>
           </a:xfrm>
           <a:prstGeom prst="rect">
             <a:avLst/>
@@ -2614,14 +2105,14 @@
       </p:sp>
       <p:sp>
         <p:nvSpPr>
-          <p:cNvPr id="8" name="Month Mar"/>
+          <p:cNvPr id="9" name="Month Mar"/>
           <p:cNvSpPr txBox="1"/>
           <p:nvPr/>
         </p:nvSpPr>
         <p:spPr>
           <a:xfrm>
-            <a:off x="6287147" y="1234440"/>
-            <a:ext cx="661862" cy="320040"/>
+            <a:off x="9830145" y="1463040"/>
+            <a:ext cx="919921" cy="292608"/>
           </a:xfrm>
           <a:prstGeom prst="rect">
             <a:avLst/>
@@ -2652,14 +2143,14 @@
       </p:sp>
       <p:sp>
         <p:nvSpPr>
-          <p:cNvPr id="9" name="Month Apr"/>
+          <p:cNvPr id="10" name="Month Apr"/>
           <p:cNvSpPr txBox="1"/>
           <p:nvPr/>
         </p:nvSpPr>
         <p:spPr>
           <a:xfrm>
-            <a:off x="6949009" y="1234440"/>
-            <a:ext cx="640511" cy="320040"/>
+            <a:off x="10750066" y="1463040"/>
+            <a:ext cx="890246" cy="292608"/>
           </a:xfrm>
           <a:prstGeom prst="rect">
             <a:avLst/>
@@ -2690,14 +2181,14 @@
       </p:sp>
       <p:sp>
         <p:nvSpPr>
-          <p:cNvPr id="10" name="Row band 1"/>
+          <p:cNvPr id="11" name="Row band 1"/>
           <p:cNvSpPr/>
           <p:nvPr/>
         </p:nvSpPr>
         <p:spPr>
           <a:xfrm>
-            <a:off x="548640" y="1645920"/>
-            <a:ext cx="7040880" cy="566928"/>
+            <a:off x="548640" y="1828800"/>
+            <a:ext cx="11091672" cy="402336"/>
           </a:xfrm>
           <a:prstGeom prst="rect">
             <a:avLst/>
@@ -2717,14 +2208,14 @@
       </p:sp>
       <p:sp>
         <p:nvSpPr>
-          <p:cNvPr id="11" name="Row band 3"/>
+          <p:cNvPr id="12" name="Row band 3"/>
           <p:cNvSpPr/>
           <p:nvPr/>
         </p:nvSpPr>
         <p:spPr>
           <a:xfrm>
-            <a:off x="548640" y="2779776"/>
-            <a:ext cx="7040880" cy="566928"/>
+            <a:off x="548640" y="2633472"/>
+            <a:ext cx="11091672" cy="402336"/>
           </a:xfrm>
           <a:prstGeom prst="rect">
             <a:avLst/>
@@ -2744,14 +2235,14 @@
       </p:sp>
       <p:sp>
         <p:nvSpPr>
-          <p:cNvPr id="12" name="Row band 5"/>
+          <p:cNvPr id="13" name="Row band 5"/>
           <p:cNvSpPr/>
           <p:nvPr/>
         </p:nvSpPr>
         <p:spPr>
           <a:xfrm>
-            <a:off x="548640" y="3913632"/>
-            <a:ext cx="7040880" cy="566928"/>
+            <a:off x="548640" y="3438144"/>
+            <a:ext cx="11091672" cy="402336"/>
           </a:xfrm>
           <a:prstGeom prst="rect">
             <a:avLst/>
@@ -2771,14 +2262,14 @@
       </p:sp>
       <p:sp>
         <p:nvSpPr>
-          <p:cNvPr id="13" name="Row band 7"/>
+          <p:cNvPr id="14" name="Row band 7"/>
           <p:cNvSpPr/>
           <p:nvPr/>
         </p:nvSpPr>
         <p:spPr>
           <a:xfrm>
-            <a:off x="548640" y="5047488"/>
-            <a:ext cx="7040880" cy="566928"/>
+            <a:off x="548640" y="4242816"/>
+            <a:ext cx="11091672" cy="402336"/>
           </a:xfrm>
           <a:prstGeom prst="rect">
             <a:avLst/>
@@ -2798,14 +2289,41 @@
       </p:sp>
       <p:sp>
         <p:nvSpPr>
-          <p:cNvPr id="14" name="Row label 1"/>
+          <p:cNvPr id="15" name="Row band 9"/>
+          <p:cNvSpPr/>
+          <p:nvPr/>
+        </p:nvSpPr>
+        <p:spPr>
+          <a:xfrm>
+            <a:off x="548640" y="5047488"/>
+            <a:ext cx="11091672" cy="402336"/>
+          </a:xfrm>
+          <a:prstGeom prst="rect">
+            <a:avLst/>
+          </a:prstGeom>
+          <a:solidFill>
+            <a:schemeClr val="bg2">
+              <a:alpha val="45000"/>
+            </a:schemeClr>
+          </a:solidFill>
+          <a:ln w="12700">
+            <a:solidFill>
+              <a:schemeClr val="bg2"/>
+            </a:solidFill>
+            <a:prstDash val="solid"/>
+          </a:ln>
+        </p:spPr>
+      </p:sp>
+      <p:sp>
+        <p:nvSpPr>
+          <p:cNvPr id="16" name="Row label 1"/>
           <p:cNvSpPr txBox="1"/>
           <p:nvPr/>
         </p:nvSpPr>
         <p:spPr>
           <a:xfrm>
-            <a:off x="621792" y="1645920"/>
-            <a:ext cx="2468880" cy="566928"/>
+            <a:off x="621792" y="1828800"/>
+            <a:ext cx="3246120" cy="402336"/>
           </a:xfrm>
           <a:prstGeom prst="rect">
             <a:avLst/>
@@ -2821,45 +2339,628 @@
               <a:buNone/>
             </a:pPr>
             <a:r>
+              <a:rPr lang="en-US" sz="1100" b="1" dirty="0">
+                <a:solidFill>
+                  <a:schemeClr val="accent1"/>
+                </a:solidFill>
+              </a:rPr>
+              <a:t>WS1  </a:t>
+            </a:r>
+            <a:pPr indent="0" marL="0">
+              <a:buNone/>
+            </a:pPr>
+            <a:r>
               <a:rPr lang="en-US" sz="1200" b="1" dirty="0">
                 <a:solidFill>
                   <a:schemeClr val="tx1"/>
                 </a:solidFill>
               </a:rPr>
-              <a:t>1  Secure PETRONAS ruler</a:t>
-            </a:r>
-            <a:endParaRPr lang="en-US" sz="1200" dirty="0"/>
-          </a:p>
-          <a:p>
-            <a:pPr indent="0" marL="0">
-              <a:buNone/>
-            </a:pPr>
-            <a:r>
-              <a:rPr lang="en-US" sz="1000" dirty="0">
+              <a:t>Secure PETRONAS ruler</a:t>
+            </a:r>
+            <a:endParaRPr lang="en-US" sz="1100" dirty="0"/>
+          </a:p>
+        </p:txBody>
+      </p:sp>
+      <p:sp>
+        <p:nvSpPr>
+          <p:cNvPr id="17" name="Row dates 1"/>
+          <p:cNvSpPr txBox="1"/>
+          <p:nvPr/>
+        </p:nvSpPr>
+        <p:spPr>
+          <a:xfrm>
+            <a:off x="3931920" y="1828800"/>
+            <a:ext cx="1371600" cy="402336"/>
+          </a:xfrm>
+          <a:prstGeom prst="rect">
+            <a:avLst/>
+          </a:prstGeom>
+          <a:noFill/>
+          <a:ln/>
+        </p:spPr>
+        <p:txBody>
+          <a:bodyPr wrap="square" lIns="0" tIns="0" rIns="0" bIns="0" rtlCol="0" anchor="ctr"/>
+          <a:lstStyle/>
+          <a:p>
+            <a:pPr indent="0" marL="0">
+              <a:buNone/>
+            </a:pPr>
+            <a:r>
+              <a:rPr lang="en-US" sz="1100" dirty="0">
                 <a:solidFill>
                   <a:schemeClr val="tx2"/>
                 </a:solidFill>
               </a:rPr>
               <a:t>Now – 6 Nov</a:t>
             </a:r>
-            <a:endParaRPr lang="en-US" sz="1200" dirty="0"/>
-          </a:p>
-        </p:txBody>
-      </p:sp>
-      <p:sp>
-        <p:nvSpPr>
-          <p:cNvPr id="15" name="Bar 1 1"/>
+            <a:endParaRPr lang="en-US" sz="1100" dirty="0"/>
+          </a:p>
+        </p:txBody>
+      </p:sp>
+      <p:sp>
+        <p:nvSpPr>
+          <p:cNvPr id="18" name="Bar 1"/>
           <p:cNvSpPr/>
           <p:nvPr/>
         </p:nvSpPr>
         <p:spPr>
           <a:xfrm>
-            <a:off x="3212693" y="1801368"/>
-            <a:ext cx="619161" cy="256032"/>
+            <a:off x="5556964" y="1929384"/>
+            <a:ext cx="860571" cy="201168"/>
           </a:xfrm>
           <a:prstGeom prst="roundRect">
             <a:avLst>
-              <a:gd name="adj" fmla="val 21429"/>
+              <a:gd name="adj" fmla="val 22727"/>
+            </a:avLst>
+          </a:prstGeom>
+          <a:solidFill>
+            <a:schemeClr val="accent1"/>
+          </a:solidFill>
+          <a:ln w="12700">
+            <a:solidFill>
+              <a:schemeClr val="accent1"/>
+            </a:solidFill>
+            <a:prstDash val="solid"/>
+          </a:ln>
+        </p:spPr>
+      </p:sp>
+      <p:sp>
+        <p:nvSpPr>
+          <p:cNvPr id="19" name="Row label 2"/>
+          <p:cNvSpPr txBox="1"/>
+          <p:nvPr/>
+        </p:nvSpPr>
+        <p:spPr>
+          <a:xfrm>
+            <a:off x="621792" y="2231136"/>
+            <a:ext cx="3246120" cy="402336"/>
+          </a:xfrm>
+          <a:prstGeom prst="rect">
+            <a:avLst/>
+          </a:prstGeom>
+          <a:noFill/>
+          <a:ln/>
+        </p:spPr>
+        <p:txBody>
+          <a:bodyPr wrap="square" lIns="0" tIns="0" rIns="0" bIns="0" rtlCol="0" anchor="ctr"/>
+          <a:lstStyle/>
+          <a:p>
+            <a:pPr indent="0" marL="0">
+              <a:buNone/>
+            </a:pPr>
+            <a:r>
+              <a:rPr lang="en-US" sz="1100" b="1" dirty="0">
+                <a:solidFill>
+                  <a:schemeClr val="accent1"/>
+                </a:solidFill>
+              </a:rPr>
+              <a:t>WS1  </a:t>
+            </a:r>
+            <a:pPr indent="0" marL="0">
+              <a:buNone/>
+            </a:pPr>
+            <a:r>
+              <a:rPr lang="en-US" sz="1200" b="1" dirty="0">
+                <a:solidFill>
+                  <a:schemeClr val="tx1"/>
+                </a:solidFill>
+              </a:rPr>
+              <a:t>Customise generic ruler</a:t>
+            </a:r>
+            <a:endParaRPr lang="en-US" sz="1100" dirty="0"/>
+          </a:p>
+        </p:txBody>
+      </p:sp>
+      <p:sp>
+        <p:nvSpPr>
+          <p:cNvPr id="20" name="Row dates 2"/>
+          <p:cNvSpPr txBox="1"/>
+          <p:nvPr/>
+        </p:nvSpPr>
+        <p:spPr>
+          <a:xfrm>
+            <a:off x="3931920" y="2231136"/>
+            <a:ext cx="1371600" cy="402336"/>
+          </a:xfrm>
+          <a:prstGeom prst="rect">
+            <a:avLst/>
+          </a:prstGeom>
+          <a:noFill/>
+          <a:ln/>
+        </p:spPr>
+        <p:txBody>
+          <a:bodyPr wrap="square" lIns="0" tIns="0" rIns="0" bIns="0" rtlCol="0" anchor="ctr"/>
+          <a:lstStyle/>
+          <a:p>
+            <a:pPr indent="0" marL="0">
+              <a:buNone/>
+            </a:pPr>
+            <a:r>
+              <a:rPr lang="en-US" sz="1100" dirty="0">
+                <a:solidFill>
+                  <a:schemeClr val="tx2"/>
+                </a:solidFill>
+              </a:rPr>
+              <a:t>9 Nov – 4 Dec</a:t>
+            </a:r>
+            <a:endParaRPr lang="en-US" sz="1100" dirty="0"/>
+          </a:p>
+        </p:txBody>
+      </p:sp>
+      <p:sp>
+        <p:nvSpPr>
+          <p:cNvPr id="21" name="Bar 2"/>
+          <p:cNvSpPr/>
+          <p:nvPr/>
+        </p:nvSpPr>
+        <p:spPr>
+          <a:xfrm>
+            <a:off x="6506560" y="2331720"/>
+            <a:ext cx="741872" cy="201168"/>
+          </a:xfrm>
+          <a:prstGeom prst="roundRect">
+            <a:avLst>
+              <a:gd name="adj" fmla="val 22727"/>
+            </a:avLst>
+          </a:prstGeom>
+          <a:solidFill>
+            <a:schemeClr val="accent1"/>
+          </a:solidFill>
+          <a:ln w="12700">
+            <a:solidFill>
+              <a:schemeClr val="accent1"/>
+            </a:solidFill>
+            <a:prstDash val="solid"/>
+          </a:ln>
+        </p:spPr>
+      </p:sp>
+      <p:sp>
+        <p:nvSpPr>
+          <p:cNvPr id="22" name="Row label 3"/>
+          <p:cNvSpPr txBox="1"/>
+          <p:nvPr/>
+        </p:nvSpPr>
+        <p:spPr>
+          <a:xfrm>
+            <a:off x="621792" y="2633472"/>
+            <a:ext cx="3246120" cy="402336"/>
+          </a:xfrm>
+          <a:prstGeom prst="rect">
+            <a:avLst/>
+          </a:prstGeom>
+          <a:noFill/>
+          <a:ln/>
+        </p:spPr>
+        <p:txBody>
+          <a:bodyPr wrap="square" lIns="0" tIns="0" rIns="0" bIns="0" rtlCol="0" anchor="ctr"/>
+          <a:lstStyle/>
+          <a:p>
+            <a:pPr indent="0" marL="0">
+              <a:buNone/>
+            </a:pPr>
+            <a:r>
+              <a:rPr lang="en-US" sz="1100" b="1" dirty="0">
+                <a:solidFill>
+                  <a:schemeClr val="accent1"/>
+                </a:solidFill>
+              </a:rPr>
+              <a:t>WS1  </a:t>
+            </a:r>
+            <a:pPr indent="0" marL="0">
+              <a:buNone/>
+            </a:pPr>
+            <a:r>
+              <a:rPr lang="en-US" sz="1200" b="1" dirty="0">
+                <a:solidFill>
+                  <a:schemeClr val="tx1"/>
+                </a:solidFill>
+              </a:rPr>
+              <a:t>Review &amp; refine ruler</a:t>
+            </a:r>
+            <a:endParaRPr lang="en-US" sz="1100" dirty="0"/>
+          </a:p>
+        </p:txBody>
+      </p:sp>
+      <p:sp>
+        <p:nvSpPr>
+          <p:cNvPr id="23" name="Row dates 3"/>
+          <p:cNvSpPr txBox="1"/>
+          <p:nvPr/>
+        </p:nvSpPr>
+        <p:spPr>
+          <a:xfrm>
+            <a:off x="3931920" y="2633472"/>
+            <a:ext cx="1371600" cy="402336"/>
+          </a:xfrm>
+          <a:prstGeom prst="rect">
+            <a:avLst/>
+          </a:prstGeom>
+          <a:noFill/>
+          <a:ln/>
+        </p:spPr>
+        <p:txBody>
+          <a:bodyPr wrap="square" lIns="0" tIns="0" rIns="0" bIns="0" rtlCol="0" anchor="ctr"/>
+          <a:lstStyle/>
+          <a:p>
+            <a:pPr indent="0" marL="0">
+              <a:buNone/>
+            </a:pPr>
+            <a:r>
+              <a:rPr lang="en-US" sz="1100" dirty="0">
+                <a:solidFill>
+                  <a:schemeClr val="tx2"/>
+                </a:solidFill>
+              </a:rPr>
+              <a:t>7 Dec – 15 Jan</a:t>
+            </a:r>
+            <a:endParaRPr lang="en-US" sz="1100" dirty="0"/>
+          </a:p>
+        </p:txBody>
+      </p:sp>
+      <p:sp>
+        <p:nvSpPr>
+          <p:cNvPr id="24" name="Bar 3"/>
+          <p:cNvSpPr/>
+          <p:nvPr/>
+        </p:nvSpPr>
+        <p:spPr>
+          <a:xfrm>
+            <a:off x="7337456" y="2734056"/>
+            <a:ext cx="1157320" cy="201168"/>
+          </a:xfrm>
+          <a:prstGeom prst="roundRect">
+            <a:avLst>
+              <a:gd name="adj" fmla="val 22727"/>
+            </a:avLst>
+          </a:prstGeom>
+          <a:solidFill>
+            <a:schemeClr val="accent1"/>
+          </a:solidFill>
+          <a:ln w="12700">
+            <a:solidFill>
+              <a:schemeClr val="accent1"/>
+            </a:solidFill>
+            <a:prstDash val="solid"/>
+          </a:ln>
+        </p:spPr>
+      </p:sp>
+      <p:sp>
+        <p:nvSpPr>
+          <p:cNvPr id="25" name="Row label 4"/>
+          <p:cNvSpPr txBox="1"/>
+          <p:nvPr/>
+        </p:nvSpPr>
+        <p:spPr>
+          <a:xfrm>
+            <a:off x="621792" y="3035808"/>
+            <a:ext cx="3246120" cy="402336"/>
+          </a:xfrm>
+          <a:prstGeom prst="rect">
+            <a:avLst/>
+          </a:prstGeom>
+          <a:noFill/>
+          <a:ln/>
+        </p:spPr>
+        <p:txBody>
+          <a:bodyPr wrap="square" lIns="0" tIns="0" rIns="0" bIns="0" rtlCol="0" anchor="ctr"/>
+          <a:lstStyle/>
+          <a:p>
+            <a:pPr indent="0" marL="0">
+              <a:buNone/>
+            </a:pPr>
+            <a:r>
+              <a:rPr lang="en-US" sz="1100" b="1" dirty="0">
+                <a:solidFill>
+                  <a:schemeClr val="accent2"/>
+                </a:solidFill>
+              </a:rPr>
+              <a:t>WS2  </a:t>
+            </a:r>
+            <a:pPr indent="0" marL="0">
+              <a:buNone/>
+            </a:pPr>
+            <a:r>
+              <a:rPr lang="en-US" sz="1200" b="1" dirty="0">
+                <a:solidFill>
+                  <a:schemeClr val="tx1"/>
+                </a:solidFill>
+              </a:rPr>
+              <a:t>Define renewables requirements</a:t>
+            </a:r>
+            <a:endParaRPr lang="en-US" sz="1100" dirty="0"/>
+          </a:p>
+        </p:txBody>
+      </p:sp>
+      <p:sp>
+        <p:nvSpPr>
+          <p:cNvPr id="26" name="Row dates 4"/>
+          <p:cNvSpPr txBox="1"/>
+          <p:nvPr/>
+        </p:nvSpPr>
+        <p:spPr>
+          <a:xfrm>
+            <a:off x="3931920" y="3035808"/>
+            <a:ext cx="1371600" cy="402336"/>
+          </a:xfrm>
+          <a:prstGeom prst="rect">
+            <a:avLst/>
+          </a:prstGeom>
+          <a:noFill/>
+          <a:ln/>
+        </p:spPr>
+        <p:txBody>
+          <a:bodyPr wrap="square" lIns="0" tIns="0" rIns="0" bIns="0" rtlCol="0" anchor="ctr"/>
+          <a:lstStyle/>
+          <a:p>
+            <a:pPr indent="0" marL="0">
+              <a:buNone/>
+            </a:pPr>
+            <a:r>
+              <a:rPr lang="en-US" sz="1100" dirty="0">
+                <a:solidFill>
+                  <a:schemeClr val="tx2"/>
+                </a:solidFill>
+              </a:rPr>
+              <a:t>19 Oct – 4 Dec</a:t>
+            </a:r>
+            <a:endParaRPr lang="en-US" sz="1100" dirty="0"/>
+          </a:p>
+        </p:txBody>
+      </p:sp>
+      <p:sp>
+        <p:nvSpPr>
+          <p:cNvPr id="27" name="Bar 4"/>
+          <p:cNvSpPr/>
+          <p:nvPr/>
+        </p:nvSpPr>
+        <p:spPr>
+          <a:xfrm>
+            <a:off x="5883388" y="3136392"/>
+            <a:ext cx="1365044" cy="201168"/>
+          </a:xfrm>
+          <a:prstGeom prst="roundRect">
+            <a:avLst>
+              <a:gd name="adj" fmla="val 22727"/>
+            </a:avLst>
+          </a:prstGeom>
+          <a:solidFill>
+            <a:schemeClr val="accent2"/>
+          </a:solidFill>
+          <a:ln w="12700">
+            <a:solidFill>
+              <a:schemeClr val="accent2"/>
+            </a:solidFill>
+            <a:prstDash val="solid"/>
+          </a:ln>
+        </p:spPr>
+      </p:sp>
+      <p:sp>
+        <p:nvSpPr>
+          <p:cNvPr id="28" name="Row label 5"/>
+          <p:cNvSpPr txBox="1"/>
+          <p:nvPr/>
+        </p:nvSpPr>
+        <p:spPr>
+          <a:xfrm>
+            <a:off x="621792" y="3438144"/>
+            <a:ext cx="3246120" cy="402336"/>
+          </a:xfrm>
+          <a:prstGeom prst="rect">
+            <a:avLst/>
+          </a:prstGeom>
+          <a:noFill/>
+          <a:ln/>
+        </p:spPr>
+        <p:txBody>
+          <a:bodyPr wrap="square" lIns="0" tIns="0" rIns="0" bIns="0" rtlCol="0" anchor="ctr"/>
+          <a:lstStyle/>
+          <a:p>
+            <a:pPr indent="0" marL="0">
+              <a:buNone/>
+            </a:pPr>
+            <a:r>
+              <a:rPr lang="en-US" sz="1100" b="1" dirty="0">
+                <a:solidFill>
+                  <a:schemeClr val="accent2"/>
+                </a:solidFill>
+              </a:rPr>
+              <a:t>WS2  </a:t>
+            </a:r>
+            <a:pPr indent="0" marL="0">
+              <a:buNone/>
+            </a:pPr>
+            <a:r>
+              <a:rPr lang="en-US" sz="1200" b="1" dirty="0">
+                <a:solidFill>
+                  <a:schemeClr val="tx1"/>
+                </a:solidFill>
+              </a:rPr>
+              <a:t>Review &amp; refine requirements</a:t>
+            </a:r>
+            <a:endParaRPr lang="en-US" sz="1100" dirty="0"/>
+          </a:p>
+        </p:txBody>
+      </p:sp>
+      <p:sp>
+        <p:nvSpPr>
+          <p:cNvPr id="29" name="Row dates 5"/>
+          <p:cNvSpPr txBox="1"/>
+          <p:nvPr/>
+        </p:nvSpPr>
+        <p:spPr>
+          <a:xfrm>
+            <a:off x="3931920" y="3438144"/>
+            <a:ext cx="1371600" cy="402336"/>
+          </a:xfrm>
+          <a:prstGeom prst="rect">
+            <a:avLst/>
+          </a:prstGeom>
+          <a:noFill/>
+          <a:ln/>
+        </p:spPr>
+        <p:txBody>
+          <a:bodyPr wrap="square" lIns="0" tIns="0" rIns="0" bIns="0" rtlCol="0" anchor="ctr"/>
+          <a:lstStyle/>
+          <a:p>
+            <a:pPr indent="0" marL="0">
+              <a:buNone/>
+            </a:pPr>
+            <a:r>
+              <a:rPr lang="en-US" sz="1100" dirty="0">
+                <a:solidFill>
+                  <a:schemeClr val="tx2"/>
+                </a:solidFill>
+              </a:rPr>
+              <a:t>7 Dec – 15 Jan</a:t>
+            </a:r>
+            <a:endParaRPr lang="en-US" sz="1100" dirty="0"/>
+          </a:p>
+        </p:txBody>
+      </p:sp>
+      <p:sp>
+        <p:nvSpPr>
+          <p:cNvPr id="30" name="Bar 5"/>
+          <p:cNvSpPr/>
+          <p:nvPr/>
+        </p:nvSpPr>
+        <p:spPr>
+          <a:xfrm>
+            <a:off x="7337456" y="3538728"/>
+            <a:ext cx="1157320" cy="201168"/>
+          </a:xfrm>
+          <a:prstGeom prst="roundRect">
+            <a:avLst>
+              <a:gd name="adj" fmla="val 22727"/>
+            </a:avLst>
+          </a:prstGeom>
+          <a:solidFill>
+            <a:schemeClr val="accent2"/>
+          </a:solidFill>
+          <a:ln w="12700">
+            <a:solidFill>
+              <a:schemeClr val="accent2"/>
+            </a:solidFill>
+            <a:prstDash val="solid"/>
+          </a:ln>
+        </p:spPr>
+      </p:sp>
+      <p:sp>
+        <p:nvSpPr>
+          <p:cNvPr id="31" name="Row label 6"/>
+          <p:cNvSpPr txBox="1"/>
+          <p:nvPr/>
+        </p:nvSpPr>
+        <p:spPr>
+          <a:xfrm>
+            <a:off x="621792" y="3840480"/>
+            <a:ext cx="3246120" cy="402336"/>
+          </a:xfrm>
+          <a:prstGeom prst="rect">
+            <a:avLst/>
+          </a:prstGeom>
+          <a:noFill/>
+          <a:ln/>
+        </p:spPr>
+        <p:txBody>
+          <a:bodyPr wrap="square" lIns="0" tIns="0" rIns="0" bIns="0" rtlCol="0" anchor="ctr"/>
+          <a:lstStyle/>
+          <a:p>
+            <a:pPr indent="0" marL="0">
+              <a:buNone/>
+            </a:pPr>
+            <a:r>
+              <a:rPr lang="en-US" sz="1100" b="1" dirty="0">
+                <a:solidFill>
+                  <a:schemeClr val="accent3"/>
+                </a:solidFill>
+              </a:rPr>
+              <a:t>WS3  </a:t>
+            </a:r>
+            <a:pPr indent="0" marL="0">
+              <a:buNone/>
+            </a:pPr>
+            <a:r>
+              <a:rPr lang="en-US" sz="1200" b="1" dirty="0">
+                <a:solidFill>
+                  <a:schemeClr val="tx1"/>
+                </a:solidFill>
+              </a:rPr>
+              <a:t>Align JCP/JF to framework</a:t>
+            </a:r>
+            <a:endParaRPr lang="en-US" sz="1100" dirty="0"/>
+          </a:p>
+        </p:txBody>
+      </p:sp>
+      <p:sp>
+        <p:nvSpPr>
+          <p:cNvPr id="32" name="Row dates 6"/>
+          <p:cNvSpPr txBox="1"/>
+          <p:nvPr/>
+        </p:nvSpPr>
+        <p:spPr>
+          <a:xfrm>
+            <a:off x="3931920" y="3840480"/>
+            <a:ext cx="1371600" cy="402336"/>
+          </a:xfrm>
+          <a:prstGeom prst="rect">
+            <a:avLst/>
+          </a:prstGeom>
+          <a:noFill/>
+          <a:ln/>
+        </p:spPr>
+        <p:txBody>
+          <a:bodyPr wrap="square" lIns="0" tIns="0" rIns="0" bIns="0" rtlCol="0" anchor="ctr"/>
+          <a:lstStyle/>
+          <a:p>
+            <a:pPr indent="0" marL="0">
+              <a:buNone/>
+            </a:pPr>
+            <a:r>
+              <a:rPr lang="en-US" sz="1100" dirty="0">
+                <a:solidFill>
+                  <a:schemeClr val="tx2"/>
+                </a:solidFill>
+              </a:rPr>
+              <a:t>Now – 15 Jan</a:t>
+            </a:r>
+            <a:endParaRPr lang="en-US" sz="1100" dirty="0"/>
+          </a:p>
+        </p:txBody>
+      </p:sp>
+      <p:sp>
+        <p:nvSpPr>
+          <p:cNvPr id="33" name="Bar 6"/>
+          <p:cNvSpPr/>
+          <p:nvPr/>
+        </p:nvSpPr>
+        <p:spPr>
+          <a:xfrm>
+            <a:off x="5556964" y="3941064"/>
+            <a:ext cx="2937812" cy="201168"/>
+          </a:xfrm>
+          <a:prstGeom prst="roundRect">
+            <a:avLst>
+              <a:gd name="adj" fmla="val 22727"/>
             </a:avLst>
           </a:prstGeom>
           <a:solidFill>
@@ -2875,14 +2976,14 @@
       </p:sp>
       <p:sp>
         <p:nvSpPr>
-          <p:cNvPr id="16" name="Row label 2"/>
+          <p:cNvPr id="34" name="Row label 7"/>
           <p:cNvSpPr txBox="1"/>
           <p:nvPr/>
         </p:nvSpPr>
         <p:spPr>
           <a:xfrm>
-            <a:off x="621792" y="2212848"/>
-            <a:ext cx="2468880" cy="566928"/>
+            <a:off x="621792" y="4242816"/>
+            <a:ext cx="3246120" cy="402336"/>
           </a:xfrm>
           <a:prstGeom prst="rect">
             <a:avLst/>
@@ -2898,45 +2999,553 @@
               <a:buNone/>
             </a:pPr>
             <a:r>
+              <a:rPr lang="en-US" sz="1100" b="1" dirty="0">
+                <a:solidFill>
+                  <a:schemeClr val="accent4"/>
+                </a:solidFill>
+              </a:rPr>
+              <a:t>ALL  </a:t>
+            </a:r>
+            <a:pPr indent="0" marL="0">
+              <a:buNone/>
+            </a:pPr>
+            <a:r>
               <a:rPr lang="en-US" sz="1200" b="1" dirty="0">
                 <a:solidFill>
                   <a:schemeClr val="tx1"/>
                 </a:solidFill>
               </a:rPr>
-              <a:t>2  Customise ruler</a:t>
-            </a:r>
-            <a:endParaRPr lang="en-US" sz="1200" dirty="0"/>
-          </a:p>
-          <a:p>
-            <a:pPr indent="0" marL="0">
-              <a:buNone/>
-            </a:pPr>
-            <a:r>
-              <a:rPr lang="en-US" sz="1000" dirty="0">
+              <a:t>Identify &amp; brief pilot group</a:t>
+            </a:r>
+            <a:endParaRPr lang="en-US" sz="1100" dirty="0"/>
+          </a:p>
+        </p:txBody>
+      </p:sp>
+      <p:sp>
+        <p:nvSpPr>
+          <p:cNvPr id="35" name="Row dates 7"/>
+          <p:cNvSpPr txBox="1"/>
+          <p:nvPr/>
+        </p:nvSpPr>
+        <p:spPr>
+          <a:xfrm>
+            <a:off x="3931920" y="4242816"/>
+            <a:ext cx="1371600" cy="402336"/>
+          </a:xfrm>
+          <a:prstGeom prst="rect">
+            <a:avLst/>
+          </a:prstGeom>
+          <a:noFill/>
+          <a:ln/>
+        </p:spPr>
+        <p:txBody>
+          <a:bodyPr wrap="square" lIns="0" tIns="0" rIns="0" bIns="0" rtlCol="0" anchor="ctr"/>
+          <a:lstStyle/>
+          <a:p>
+            <a:pPr indent="0" marL="0">
+              <a:buNone/>
+            </a:pPr>
+            <a:r>
+              <a:rPr lang="en-US" sz="1100" dirty="0">
                 <a:solidFill>
                   <a:schemeClr val="tx2"/>
                 </a:solidFill>
               </a:rPr>
-              <a:t>9 Nov – 4 Dec</a:t>
-            </a:r>
-            <a:endParaRPr lang="en-US" sz="1200" dirty="0"/>
-          </a:p>
-        </p:txBody>
-      </p:sp>
-      <p:sp>
-        <p:nvSpPr>
-          <p:cNvPr id="17" name="Bar 2 2"/>
+              <a:t>16 Nov – 18 Dec</a:t>
+            </a:r>
+            <a:endParaRPr lang="en-US" sz="1100" dirty="0"/>
+          </a:p>
+        </p:txBody>
+      </p:sp>
+      <p:sp>
+        <p:nvSpPr>
+          <p:cNvPr id="36" name="Bar 7"/>
           <p:cNvSpPr/>
           <p:nvPr/>
         </p:nvSpPr>
         <p:spPr>
           <a:xfrm>
-            <a:off x="3895905" y="2368296"/>
-            <a:ext cx="533759" cy="256032"/>
+            <a:off x="6714284" y="4343400"/>
+            <a:ext cx="949596" cy="201168"/>
           </a:xfrm>
           <a:prstGeom prst="roundRect">
             <a:avLst>
-              <a:gd name="adj" fmla="val 21429"/>
+              <a:gd name="adj" fmla="val 22727"/>
+            </a:avLst>
+          </a:prstGeom>
+          <a:solidFill>
+            <a:schemeClr val="accent4"/>
+          </a:solidFill>
+          <a:ln w="12700">
+            <a:solidFill>
+              <a:schemeClr val="accent4"/>
+            </a:solidFill>
+            <a:prstDash val="solid"/>
+          </a:ln>
+        </p:spPr>
+      </p:sp>
+      <p:sp>
+        <p:nvSpPr>
+          <p:cNvPr id="37" name="Row label 8"/>
+          <p:cNvSpPr txBox="1"/>
+          <p:nvPr/>
+        </p:nvSpPr>
+        <p:spPr>
+          <a:xfrm>
+            <a:off x="621792" y="4645152"/>
+            <a:ext cx="3246120" cy="402336"/>
+          </a:xfrm>
+          <a:prstGeom prst="rect">
+            <a:avLst/>
+          </a:prstGeom>
+          <a:noFill/>
+          <a:ln/>
+        </p:spPr>
+        <p:txBody>
+          <a:bodyPr wrap="square" lIns="0" tIns="0" rIns="0" bIns="0" rtlCol="0" anchor="ctr"/>
+          <a:lstStyle/>
+          <a:p>
+            <a:pPr indent="0" marL="0">
+              <a:buNone/>
+            </a:pPr>
+            <a:r>
+              <a:rPr lang="en-US" sz="1100" b="1" dirty="0">
+                <a:solidFill>
+                  <a:schemeClr val="accent4"/>
+                </a:solidFill>
+              </a:rPr>
+              <a:t>WS1+2  </a:t>
+            </a:r>
+            <a:pPr indent="0" marL="0">
+              <a:buNone/>
+            </a:pPr>
+            <a:r>
+              <a:rPr lang="en-US" sz="1200" b="1" dirty="0">
+                <a:solidFill>
+                  <a:schemeClr val="tx1"/>
+                </a:solidFill>
+              </a:rPr>
+              <a:t>Apply ruler, identify gaps</a:t>
+            </a:r>
+            <a:endParaRPr lang="en-US" sz="1100" dirty="0"/>
+          </a:p>
+        </p:txBody>
+      </p:sp>
+      <p:sp>
+        <p:nvSpPr>
+          <p:cNvPr id="38" name="Row dates 8"/>
+          <p:cNvSpPr txBox="1"/>
+          <p:nvPr/>
+        </p:nvSpPr>
+        <p:spPr>
+          <a:xfrm>
+            <a:off x="3931920" y="4645152"/>
+            <a:ext cx="1371600" cy="402336"/>
+          </a:xfrm>
+          <a:prstGeom prst="rect">
+            <a:avLst/>
+          </a:prstGeom>
+          <a:noFill/>
+          <a:ln/>
+        </p:spPr>
+        <p:txBody>
+          <a:bodyPr wrap="square" lIns="0" tIns="0" rIns="0" bIns="0" rtlCol="0" anchor="ctr"/>
+          <a:lstStyle/>
+          <a:p>
+            <a:pPr indent="0" marL="0">
+              <a:buNone/>
+            </a:pPr>
+            <a:r>
+              <a:rPr lang="en-US" sz="1100" dirty="0">
+                <a:solidFill>
+                  <a:schemeClr val="tx2"/>
+                </a:solidFill>
+              </a:rPr>
+              <a:t>18 Jan – 26 Feb</a:t>
+            </a:r>
+            <a:endParaRPr lang="en-US" sz="1100" dirty="0"/>
+          </a:p>
+        </p:txBody>
+      </p:sp>
+      <p:sp>
+        <p:nvSpPr>
+          <p:cNvPr id="39" name="Bar 8"/>
+          <p:cNvSpPr/>
+          <p:nvPr/>
+        </p:nvSpPr>
+        <p:spPr>
+          <a:xfrm>
+            <a:off x="8583801" y="4745736"/>
+            <a:ext cx="1157320" cy="201168"/>
+          </a:xfrm>
+          <a:prstGeom prst="roundRect">
+            <a:avLst>
+              <a:gd name="adj" fmla="val 22727"/>
+            </a:avLst>
+          </a:prstGeom>
+          <a:solidFill>
+            <a:schemeClr val="accent4"/>
+          </a:solidFill>
+          <a:ln w="12700">
+            <a:solidFill>
+              <a:schemeClr val="accent4"/>
+            </a:solidFill>
+            <a:prstDash val="solid"/>
+          </a:ln>
+        </p:spPr>
+      </p:sp>
+      <p:sp>
+        <p:nvSpPr>
+          <p:cNvPr id="40" name="Row label 9"/>
+          <p:cNvSpPr txBox="1"/>
+          <p:nvPr/>
+        </p:nvSpPr>
+        <p:spPr>
+          <a:xfrm>
+            <a:off x="621792" y="5047488"/>
+            <a:ext cx="3246120" cy="402336"/>
+          </a:xfrm>
+          <a:prstGeom prst="rect">
+            <a:avLst/>
+          </a:prstGeom>
+          <a:noFill/>
+          <a:ln/>
+        </p:spPr>
+        <p:txBody>
+          <a:bodyPr wrap="square" lIns="0" tIns="0" rIns="0" bIns="0" rtlCol="0" anchor="ctr"/>
+          <a:lstStyle/>
+          <a:p>
+            <a:pPr indent="0" marL="0">
+              <a:buNone/>
+            </a:pPr>
+            <a:r>
+              <a:rPr lang="en-US" sz="1100" b="1" dirty="0">
+                <a:solidFill>
+                  <a:schemeClr val="accent4"/>
+                </a:solidFill>
+              </a:rPr>
+              <a:t>ALL  </a:t>
+            </a:r>
+            <a:pPr indent="0" marL="0">
+              <a:buNone/>
+            </a:pPr>
+            <a:r>
+              <a:rPr lang="en-US" sz="1200" b="1" dirty="0">
+                <a:solidFill>
+                  <a:schemeClr val="tx1"/>
+                </a:solidFill>
+              </a:rPr>
+              <a:t>Link gaps to IDPs</a:t>
+            </a:r>
+            <a:endParaRPr lang="en-US" sz="1100" dirty="0"/>
+          </a:p>
+        </p:txBody>
+      </p:sp>
+      <p:sp>
+        <p:nvSpPr>
+          <p:cNvPr id="41" name="Row dates 9"/>
+          <p:cNvSpPr txBox="1"/>
+          <p:nvPr/>
+        </p:nvSpPr>
+        <p:spPr>
+          <a:xfrm>
+            <a:off x="3931920" y="5047488"/>
+            <a:ext cx="1371600" cy="402336"/>
+          </a:xfrm>
+          <a:prstGeom prst="rect">
+            <a:avLst/>
+          </a:prstGeom>
+          <a:noFill/>
+          <a:ln/>
+        </p:spPr>
+        <p:txBody>
+          <a:bodyPr wrap="square" lIns="0" tIns="0" rIns="0" bIns="0" rtlCol="0" anchor="ctr"/>
+          <a:lstStyle/>
+          <a:p>
+            <a:pPr indent="0" marL="0">
+              <a:buNone/>
+            </a:pPr>
+            <a:r>
+              <a:rPr lang="en-US" sz="1100" dirty="0">
+                <a:solidFill>
+                  <a:schemeClr val="tx2"/>
+                </a:solidFill>
+              </a:rPr>
+              <a:t>1 – 26 Mar</a:t>
+            </a:r>
+            <a:endParaRPr lang="en-US" sz="1100" dirty="0"/>
+          </a:p>
+        </p:txBody>
+      </p:sp>
+      <p:sp>
+        <p:nvSpPr>
+          <p:cNvPr id="42" name="Bar 9"/>
+          <p:cNvSpPr/>
+          <p:nvPr/>
+        </p:nvSpPr>
+        <p:spPr>
+          <a:xfrm>
+            <a:off x="9830145" y="5148072"/>
+            <a:ext cx="741872" cy="201168"/>
+          </a:xfrm>
+          <a:prstGeom prst="roundRect">
+            <a:avLst>
+              <a:gd name="adj" fmla="val 22727"/>
+            </a:avLst>
+          </a:prstGeom>
+          <a:solidFill>
+            <a:schemeClr val="accent4"/>
+          </a:solidFill>
+          <a:ln w="12700">
+            <a:solidFill>
+              <a:schemeClr val="accent4"/>
+            </a:solidFill>
+            <a:prstDash val="solid"/>
+          </a:ln>
+        </p:spPr>
+      </p:sp>
+      <p:sp>
+        <p:nvSpPr>
+          <p:cNvPr id="43" name="Row label 10"/>
+          <p:cNvSpPr txBox="1"/>
+          <p:nvPr/>
+        </p:nvSpPr>
+        <p:spPr>
+          <a:xfrm>
+            <a:off x="621792" y="5449824"/>
+            <a:ext cx="3246120" cy="402336"/>
+          </a:xfrm>
+          <a:prstGeom prst="rect">
+            <a:avLst/>
+          </a:prstGeom>
+          <a:noFill/>
+          <a:ln/>
+        </p:spPr>
+        <p:txBody>
+          <a:bodyPr wrap="square" lIns="0" tIns="0" rIns="0" bIns="0" rtlCol="0" anchor="ctr"/>
+          <a:lstStyle/>
+          <a:p>
+            <a:pPr indent="0" marL="0">
+              <a:buNone/>
+            </a:pPr>
+            <a:r>
+              <a:rPr lang="en-US" sz="1100" b="1" dirty="0">
+                <a:solidFill>
+                  <a:schemeClr val="accent4"/>
+                </a:solidFill>
+              </a:rPr>
+              <a:t>ALL  </a:t>
+            </a:r>
+            <a:pPr indent="0" marL="0">
+              <a:buNone/>
+            </a:pPr>
+            <a:r>
+              <a:rPr lang="en-US" sz="1200" b="1" dirty="0">
+                <a:solidFill>
+                  <a:schemeClr val="tx1"/>
+                </a:solidFill>
+              </a:rPr>
+              <a:t>Review pilot outcomes</a:t>
+            </a:r>
+            <a:endParaRPr lang="en-US" sz="1100" dirty="0"/>
+          </a:p>
+        </p:txBody>
+      </p:sp>
+      <p:sp>
+        <p:nvSpPr>
+          <p:cNvPr id="44" name="Row dates 10"/>
+          <p:cNvSpPr txBox="1"/>
+          <p:nvPr/>
+        </p:nvSpPr>
+        <p:spPr>
+          <a:xfrm>
+            <a:off x="3931920" y="5449824"/>
+            <a:ext cx="1371600" cy="402336"/>
+          </a:xfrm>
+          <a:prstGeom prst="rect">
+            <a:avLst/>
+          </a:prstGeom>
+          <a:noFill/>
+          <a:ln/>
+        </p:spPr>
+        <p:txBody>
+          <a:bodyPr wrap="square" lIns="0" tIns="0" rIns="0" bIns="0" rtlCol="0" anchor="ctr"/>
+          <a:lstStyle/>
+          <a:p>
+            <a:pPr indent="0" marL="0">
+              <a:buNone/>
+            </a:pPr>
+            <a:r>
+              <a:rPr lang="en-US" sz="1100" dirty="0">
+                <a:solidFill>
+                  <a:schemeClr val="tx2"/>
+                </a:solidFill>
+              </a:rPr>
+              <a:t>Apr (SCo TBC)</a:t>
+            </a:r>
+            <a:endParaRPr lang="en-US" sz="1100" dirty="0"/>
+          </a:p>
+        </p:txBody>
+      </p:sp>
+      <p:sp>
+        <p:nvSpPr>
+          <p:cNvPr id="45" name="Bar 10"/>
+          <p:cNvSpPr/>
+          <p:nvPr/>
+        </p:nvSpPr>
+        <p:spPr>
+          <a:xfrm>
+            <a:off x="10661041" y="5550408"/>
+            <a:ext cx="949596" cy="201168"/>
+          </a:xfrm>
+          <a:prstGeom prst="roundRect">
+            <a:avLst>
+              <a:gd name="adj" fmla="val 22727"/>
+            </a:avLst>
+          </a:prstGeom>
+          <a:solidFill>
+            <a:schemeClr val="accent4"/>
+          </a:solidFill>
+          <a:ln w="12700">
+            <a:solidFill>
+              <a:schemeClr val="accent4"/>
+            </a:solidFill>
+            <a:prstDash val="solid"/>
+          </a:ln>
+        </p:spPr>
+      </p:sp>
+      <p:sp>
+        <p:nvSpPr>
+          <p:cNvPr id="46" name="Milestone line 1"/>
+          <p:cNvSpPr/>
+          <p:nvPr/>
+        </p:nvSpPr>
+        <p:spPr>
+          <a:xfrm>
+            <a:off x="5764688" y="1801368"/>
+            <a:ext cx="0" cy="4050792"/>
+          </a:xfrm>
+          <a:prstGeom prst="line">
+            <a:avLst/>
+          </a:prstGeom>
+          <a:noFill/>
+          <a:ln w="19050">
+            <a:solidFill>
+              <a:schemeClr val="accent5"/>
+            </a:solidFill>
+            <a:prstDash val="dash"/>
+          </a:ln>
+        </p:spPr>
+      </p:sp>
+      <p:sp>
+        <p:nvSpPr>
+          <p:cNvPr id="47" name="Milestone line 2"/>
+          <p:cNvSpPr/>
+          <p:nvPr/>
+        </p:nvSpPr>
+        <p:spPr>
+          <a:xfrm>
+            <a:off x="6091112" y="1801368"/>
+            <a:ext cx="0" cy="4050792"/>
+          </a:xfrm>
+          <a:prstGeom prst="line">
+            <a:avLst/>
+          </a:prstGeom>
+          <a:noFill/>
+          <a:ln w="19050">
+            <a:solidFill>
+              <a:schemeClr val="accent5"/>
+            </a:solidFill>
+            <a:prstDash val="dash"/>
+          </a:ln>
+        </p:spPr>
+      </p:sp>
+      <p:sp>
+        <p:nvSpPr>
+          <p:cNvPr id="48" name="Milestone label 15 Oct"/>
+          <p:cNvSpPr txBox="1"/>
+          <p:nvPr/>
+        </p:nvSpPr>
+        <p:spPr>
+          <a:xfrm>
+            <a:off x="4347368" y="5907024"/>
+            <a:ext cx="1371600" cy="256032"/>
+          </a:xfrm>
+          <a:prstGeom prst="rect">
+            <a:avLst/>
+          </a:prstGeom>
+          <a:noFill/>
+          <a:ln/>
+        </p:spPr>
+        <p:txBody>
+          <a:bodyPr wrap="square" lIns="0" tIns="0" rIns="0" bIns="0" rtlCol="0" anchor="ctr"/>
+          <a:lstStyle/>
+          <a:p>
+            <a:pPr algn="r" indent="0" marL="0">
+              <a:buNone/>
+            </a:pPr>
+            <a:r>
+              <a:rPr lang="en-US" sz="1100" b="1" dirty="0">
+                <a:solidFill>
+                  <a:schemeClr val="tx1"/>
+                </a:solidFill>
+              </a:rPr>
+              <a:t>15 Oct: WS update</a:t>
+            </a:r>
+            <a:endParaRPr lang="en-US" sz="1100" dirty="0"/>
+          </a:p>
+        </p:txBody>
+      </p:sp>
+      <p:sp>
+        <p:nvSpPr>
+          <p:cNvPr id="49" name="Milestone label 26 Oct"/>
+          <p:cNvSpPr txBox="1"/>
+          <p:nvPr/>
+        </p:nvSpPr>
+        <p:spPr>
+          <a:xfrm>
+            <a:off x="6136832" y="5907024"/>
+            <a:ext cx="1280160" cy="256032"/>
+          </a:xfrm>
+          <a:prstGeom prst="rect">
+            <a:avLst/>
+          </a:prstGeom>
+          <a:noFill/>
+          <a:ln/>
+        </p:spPr>
+        <p:txBody>
+          <a:bodyPr wrap="square" lIns="0" tIns="0" rIns="0" bIns="0" rtlCol="0" anchor="ctr"/>
+          <a:lstStyle/>
+          <a:p>
+            <a:pPr indent="0" marL="0">
+              <a:buNone/>
+            </a:pPr>
+            <a:r>
+              <a:rPr lang="en-US" sz="1100" b="1" dirty="0">
+                <a:solidFill>
+                  <a:schemeClr val="tx1"/>
+                </a:solidFill>
+              </a:rPr>
+              <a:t>26 Oct: SCo</a:t>
+            </a:r>
+            <a:endParaRPr lang="en-US" sz="1100" dirty="0"/>
+          </a:p>
+        </p:txBody>
+      </p:sp>
+      <p:sp>
+        <p:nvSpPr>
+          <p:cNvPr id="50" name="Legend swatch 1"/>
+          <p:cNvSpPr/>
+          <p:nvPr/>
+        </p:nvSpPr>
+        <p:spPr>
+          <a:xfrm>
+            <a:off x="621792" y="6364224"/>
+            <a:ext cx="274320" cy="146304"/>
+          </a:xfrm>
+          <a:prstGeom prst="roundRect">
+            <a:avLst>
+              <a:gd name="adj" fmla="val 25000"/>
             </a:avLst>
           </a:prstGeom>
           <a:solidFill>
@@ -2952,14 +3561,14 @@
       </p:sp>
       <p:sp>
         <p:nvSpPr>
-          <p:cNvPr id="18" name="Row label 3"/>
+          <p:cNvPr id="51" name="Legend label 1"/>
           <p:cNvSpPr txBox="1"/>
           <p:nvPr/>
         </p:nvSpPr>
         <p:spPr>
           <a:xfrm>
-            <a:off x="621792" y="2779776"/>
-            <a:ext cx="2468880" cy="566928"/>
+            <a:off x="969264" y="6309360"/>
+            <a:ext cx="2468880" cy="256032"/>
           </a:xfrm>
           <a:prstGeom prst="rect">
             <a:avLst/>
@@ -2975,53 +3584,39 @@
               <a:buNone/>
             </a:pPr>
             <a:r>
-              <a:rPr lang="en-US" sz="1200" b="1" dirty="0">
-                <a:solidFill>
-                  <a:schemeClr val="tx1"/>
-                </a:solidFill>
-              </a:rPr>
-              <a:t>3  Review &amp; refine</a:t>
-            </a:r>
-            <a:endParaRPr lang="en-US" sz="1200" dirty="0"/>
-          </a:p>
-          <a:p>
-            <a:pPr indent="0" marL="0">
-              <a:buNone/>
-            </a:pPr>
-            <a:r>
               <a:rPr lang="en-US" sz="1000" dirty="0">
                 <a:solidFill>
                   <a:schemeClr val="tx2"/>
                 </a:solidFill>
               </a:rPr>
-              <a:t>7 Dec – 15 Jan</a:t>
-            </a:r>
-            <a:endParaRPr lang="en-US" sz="1200" dirty="0"/>
-          </a:p>
-        </p:txBody>
-      </p:sp>
-      <p:sp>
-        <p:nvSpPr>
-          <p:cNvPr id="19" name="Bar 3 3"/>
+              <a:t>WS1 Generic Electrical (India Team)</a:t>
+            </a:r>
+            <a:endParaRPr lang="en-US" sz="1000" dirty="0"/>
+          </a:p>
+        </p:txBody>
+      </p:sp>
+      <p:sp>
+        <p:nvSpPr>
+          <p:cNvPr id="52" name="Legend swatch 2"/>
           <p:cNvSpPr/>
           <p:nvPr/>
         </p:nvSpPr>
         <p:spPr>
           <a:xfrm>
-            <a:off x="4493715" y="2935224"/>
-            <a:ext cx="832665" cy="256032"/>
+            <a:off x="3657600" y="6364224"/>
+            <a:ext cx="274320" cy="146304"/>
           </a:xfrm>
           <a:prstGeom prst="roundRect">
             <a:avLst>
-              <a:gd name="adj" fmla="val 21429"/>
+              <a:gd name="adj" fmla="val 25000"/>
             </a:avLst>
           </a:prstGeom>
           <a:solidFill>
-            <a:schemeClr val="accent1"/>
+            <a:schemeClr val="accent2"/>
           </a:solidFill>
           <a:ln w="12700">
             <a:solidFill>
-              <a:schemeClr val="accent1"/>
+              <a:schemeClr val="accent2"/>
             </a:solidFill>
             <a:prstDash val="solid"/>
           </a:ln>
@@ -3029,14 +3624,14 @@
       </p:sp>
       <p:sp>
         <p:nvSpPr>
-          <p:cNvPr id="20" name="Row label 4"/>
+          <p:cNvPr id="53" name="Legend label 2"/>
           <p:cNvSpPr txBox="1"/>
           <p:nvPr/>
         </p:nvSpPr>
         <p:spPr>
           <a:xfrm>
-            <a:off x="621792" y="3346704"/>
-            <a:ext cx="2468880" cy="566928"/>
+            <a:off x="4005072" y="6309360"/>
+            <a:ext cx="2468880" cy="256032"/>
           </a:xfrm>
           <a:prstGeom prst="rect">
             <a:avLst/>
@@ -3052,45 +3647,94 @@
               <a:buNone/>
             </a:pPr>
             <a:r>
-              <a:rPr lang="en-US" sz="1200" b="1" dirty="0">
-                <a:solidFill>
-                  <a:schemeClr val="tx1"/>
-                </a:solidFill>
-              </a:rPr>
-              <a:t>+  Identify &amp; brief pilot group</a:t>
-            </a:r>
-            <a:endParaRPr lang="en-US" sz="1200" dirty="0"/>
-          </a:p>
-          <a:p>
-            <a:pPr indent="0" marL="0">
-              <a:buNone/>
-            </a:pPr>
-            <a:r>
               <a:rPr lang="en-US" sz="1000" dirty="0">
                 <a:solidFill>
                   <a:schemeClr val="tx2"/>
                 </a:solidFill>
               </a:rPr>
-              <a:t>16 Nov – 18 Dec</a:t>
-            </a:r>
-            <a:endParaRPr lang="en-US" sz="1200" dirty="0"/>
-          </a:p>
-        </p:txBody>
-      </p:sp>
-      <p:sp>
-        <p:nvSpPr>
-          <p:cNvPr id="21" name="Bar + 4"/>
+              <a:t>WS2 Renewables (Halem)</a:t>
+            </a:r>
+            <a:endParaRPr lang="en-US" sz="1000" dirty="0"/>
+          </a:p>
+        </p:txBody>
+      </p:sp>
+      <p:sp>
+        <p:nvSpPr>
+          <p:cNvPr id="54" name="Legend swatch 3"/>
           <p:cNvSpPr/>
           <p:nvPr/>
         </p:nvSpPr>
         <p:spPr>
           <a:xfrm>
-            <a:off x="4045357" y="3502152"/>
-            <a:ext cx="683212" cy="256032"/>
+            <a:off x="5943600" y="6364224"/>
+            <a:ext cx="274320" cy="146304"/>
           </a:xfrm>
           <a:prstGeom prst="roundRect">
             <a:avLst>
-              <a:gd name="adj" fmla="val 21429"/>
+              <a:gd name="adj" fmla="val 25000"/>
+            </a:avLst>
+          </a:prstGeom>
+          <a:solidFill>
+            <a:schemeClr val="accent3"/>
+          </a:solidFill>
+          <a:ln w="12700">
+            <a:solidFill>
+              <a:schemeClr val="accent3"/>
+            </a:solidFill>
+            <a:prstDash val="solid"/>
+          </a:ln>
+        </p:spPr>
+      </p:sp>
+      <p:sp>
+        <p:nvSpPr>
+          <p:cNvPr id="55" name="Legend label 3"/>
+          <p:cNvSpPr txBox="1"/>
+          <p:nvPr/>
+        </p:nvSpPr>
+        <p:spPr>
+          <a:xfrm>
+            <a:off x="6291072" y="6309360"/>
+            <a:ext cx="2468880" cy="256032"/>
+          </a:xfrm>
+          <a:prstGeom prst="rect">
+            <a:avLst/>
+          </a:prstGeom>
+          <a:noFill/>
+          <a:ln/>
+        </p:spPr>
+        <p:txBody>
+          <a:bodyPr wrap="square" lIns="0" tIns="0" rIns="0" bIns="0" rtlCol="0" anchor="ctr"/>
+          <a:lstStyle/>
+          <a:p>
+            <a:pPr indent="0" marL="0">
+              <a:buNone/>
+            </a:pPr>
+            <a:r>
+              <a:rPr lang="en-US" sz="1000" dirty="0">
+                <a:solidFill>
+                  <a:schemeClr val="tx2"/>
+                </a:solidFill>
+              </a:rPr>
+              <a:t>WS3 JCP/JF (Nizam)</a:t>
+            </a:r>
+            <a:endParaRPr lang="en-US" sz="1000" dirty="0"/>
+          </a:p>
+        </p:txBody>
+      </p:sp>
+      <p:sp>
+        <p:nvSpPr>
+          <p:cNvPr id="56" name="Legend swatch 4"/>
+          <p:cNvSpPr/>
+          <p:nvPr/>
+        </p:nvSpPr>
+        <p:spPr>
+          <a:xfrm>
+            <a:off x="8229600" y="6364224"/>
+            <a:ext cx="274320" cy="146304"/>
+          </a:xfrm>
+          <a:prstGeom prst="roundRect">
+            <a:avLst>
+              <a:gd name="adj" fmla="val 25000"/>
             </a:avLst>
           </a:prstGeom>
           <a:solidFill>
@@ -3106,14 +3750,14 @@
       </p:sp>
       <p:sp>
         <p:nvSpPr>
-          <p:cNvPr id="22" name="Row label 5"/>
+          <p:cNvPr id="57" name="Legend label 4"/>
           <p:cNvSpPr txBox="1"/>
           <p:nvPr/>
         </p:nvSpPr>
         <p:spPr>
           <a:xfrm>
-            <a:off x="621792" y="3913632"/>
-            <a:ext cx="2468880" cy="566928"/>
+            <a:off x="8577072" y="6309360"/>
+            <a:ext cx="2468880" cy="256032"/>
           </a:xfrm>
           <a:prstGeom prst="rect">
             <a:avLst/>
@@ -3129,53 +3773,141 @@
               <a:buNone/>
             </a:pPr>
             <a:r>
-              <a:rPr lang="en-US" sz="1200" b="1" dirty="0">
+              <a:rPr lang="en-US" sz="1000" dirty="0">
+                <a:solidFill>
+                  <a:schemeClr val="tx2"/>
+                </a:solidFill>
+              </a:rPr>
+              <a:t>Joint / all workstreams</a:t>
+            </a:r>
+            <a:endParaRPr lang="en-US" sz="1000" dirty="0"/>
+          </a:p>
+        </p:txBody>
+      </p:sp>
+    </p:spTree>
+  </p:cSld>
+  <p:clrMapOvr>
+    <a:masterClrMapping/>
+  </p:clrMapOvr>
+</p:sld>
+</file>
+
+<file path=ppt/slides/slide3.xml><?xml version="1.0" encoding="utf-8"?>
+<p:sld xmlns:a="http://schemas.openxmlformats.org/drawingml/2006/main" xmlns:r="http://schemas.openxmlformats.org/officeDocument/2006/relationships" xmlns:p="http://schemas.openxmlformats.org/presentationml/2006/main">
+  <p:cSld name="Slide 3">
+    <p:spTree>
+      <p:nvGrpSpPr>
+        <p:cNvPr id="1" name=""/>
+        <p:cNvGrpSpPr/>
+        <p:nvPr/>
+      </p:nvGrpSpPr>
+      <p:grpSpPr>
+        <a:xfrm>
+          <a:off x="0" y="0"/>
+          <a:ext cx="0" cy="0"/>
+          <a:chOff x="0" y="0"/>
+          <a:chExt cx="0" cy="0"/>
+        </a:xfrm>
+      </p:grpSpPr>
+      <p:sp>
+        <p:nvSpPr>
+          <p:cNvPr id="2" name="Text 0"/>
+          <p:cNvSpPr/>
+          <p:nvPr>
+            <p:ph idx="100" type="title" hasCustomPrompt="1"/>
+          </p:nvPr>
+        </p:nvSpPr>
+        <p:spPr>
+          <a:xfrm>
+            <a:off x="548640" y="320040"/>
+            <a:ext cx="11091672" cy="685800"/>
+          </a:xfrm>
+          <a:prstGeom prst="rect">
+            <a:avLst/>
+          </a:prstGeom>
+          <a:noFill/>
+          <a:ln/>
+        </p:spPr>
+        <p:txBody>
+          <a:bodyPr wrap="square" lIns="0" tIns="0" rIns="0" bIns="0" rtlCol="0" anchor="ctr"/>
+          <a:lstStyle/>
+          <a:p>
+            <a:pPr algn="l" indent="0" marL="0">
+              <a:buNone/>
+            </a:pPr>
+            <a:r>
+              <a:rPr lang="en-US" sz="3000" b="1" dirty="0">
                 <a:solidFill>
                   <a:schemeClr val="tx1"/>
                 </a:solidFill>
-              </a:rPr>
-              <a:t>4  Apply ruler, identify gaps</a:t>
-            </a:r>
-            <a:endParaRPr lang="en-US" sz="1200" dirty="0"/>
-          </a:p>
-          <a:p>
-            <a:pPr indent="0" marL="0">
-              <a:buNone/>
-            </a:pPr>
-            <a:r>
-              <a:rPr lang="en-US" sz="1000" dirty="0">
-                <a:solidFill>
-                  <a:schemeClr val="tx2"/>
-                </a:solidFill>
-              </a:rPr>
-              <a:t>18 Jan – 26 Feb</a:t>
-            </a:r>
-            <a:endParaRPr lang="en-US" sz="1200" dirty="0"/>
-          </a:p>
-        </p:txBody>
-      </p:sp>
-      <p:sp>
-        <p:nvSpPr>
-          <p:cNvPr id="23" name="Bar 4 5"/>
+                <a:latin typeface="Arial" pitchFamily="34" charset="0"/>
+                <a:ea typeface="Arial" pitchFamily="34" charset="-122"/>
+                <a:cs typeface="Arial" pitchFamily="34" charset="-120"/>
+              </a:rPr>
+              <a:t>Next steps, asks of the SCo and risks</a:t>
+            </a:r>
+            <a:endParaRPr lang="en-US" sz="3000" dirty="0"/>
+          </a:p>
+        </p:txBody>
+      </p:sp>
+      <p:sp>
+        <p:nvSpPr>
+          <p:cNvPr id="3" name="Next steps heading"/>
+          <p:cNvSpPr txBox="1"/>
+          <p:nvPr/>
+        </p:nvSpPr>
+        <p:spPr>
+          <a:xfrm>
+            <a:off x="548640" y="1188720"/>
+            <a:ext cx="6858000" cy="365760"/>
+          </a:xfrm>
+          <a:prstGeom prst="rect">
+            <a:avLst/>
+          </a:prstGeom>
+          <a:noFill/>
+          <a:ln/>
+        </p:spPr>
+        <p:txBody>
+          <a:bodyPr wrap="square" lIns="0" tIns="0" rIns="0" bIns="0" rtlCol="0" anchor="ctr"/>
+          <a:lstStyle/>
+          <a:p>
+            <a:pPr indent="0" marL="0">
+              <a:buNone/>
+            </a:pPr>
+            <a:r>
+              <a:rPr lang="en-US" sz="1800" b="1" dirty="0">
+                <a:solidFill>
+                  <a:schemeClr val="tx1"/>
+                </a:solidFill>
+              </a:rPr>
+              <a:t>Next steps</a:t>
+            </a:r>
+            <a:endParaRPr lang="en-US" sz="1800" dirty="0"/>
+          </a:p>
+        </p:txBody>
+      </p:sp>
+      <p:sp>
+        <p:nvSpPr>
+          <p:cNvPr id="4" name="Step card 1"/>
           <p:cNvSpPr/>
           <p:nvPr/>
         </p:nvSpPr>
         <p:spPr>
           <a:xfrm>
-            <a:off x="5390431" y="4069080"/>
-            <a:ext cx="832665" cy="256032"/>
+            <a:off x="548640" y="1691640"/>
+            <a:ext cx="7040880" cy="1051560"/>
           </a:xfrm>
           <a:prstGeom prst="roundRect">
             <a:avLst>
-              <a:gd name="adj" fmla="val 21429"/>
+              <a:gd name="adj" fmla="val 8696"/>
             </a:avLst>
           </a:prstGeom>
           <a:solidFill>
-            <a:schemeClr val="accent1"/>
+            <a:schemeClr val="bg2"/>
           </a:solidFill>
           <a:ln w="12700">
             <a:solidFill>
-              <a:schemeClr val="accent1"/>
+              <a:schemeClr val="bg2"/>
             </a:solidFill>
             <a:prstDash val="solid"/>
           </a:ln>
@@ -3183,227 +3915,14 @@
       </p:sp>
       <p:sp>
         <p:nvSpPr>
-          <p:cNvPr id="24" name="Row label 6"/>
-          <p:cNvSpPr txBox="1"/>
-          <p:nvPr/>
-        </p:nvSpPr>
-        <p:spPr>
-          <a:xfrm>
-            <a:off x="621792" y="4480560"/>
-            <a:ext cx="2468880" cy="566928"/>
-          </a:xfrm>
-          <a:prstGeom prst="rect">
-            <a:avLst/>
-          </a:prstGeom>
-          <a:noFill/>
-          <a:ln/>
-        </p:spPr>
-        <p:txBody>
-          <a:bodyPr wrap="square" lIns="0" tIns="0" rIns="0" bIns="0" rtlCol="0" anchor="ctr"/>
-          <a:lstStyle/>
-          <a:p>
-            <a:pPr indent="0" marL="0">
-              <a:buNone/>
-            </a:pPr>
-            <a:r>
-              <a:rPr lang="en-US" sz="1200" b="1" dirty="0">
-                <a:solidFill>
-                  <a:schemeClr val="tx1"/>
-                </a:solidFill>
-              </a:rPr>
-              <a:t>5  Link gaps to IDPs</a:t>
-            </a:r>
-            <a:endParaRPr lang="en-US" sz="1200" dirty="0"/>
-          </a:p>
-          <a:p>
-            <a:pPr indent="0" marL="0">
-              <a:buNone/>
-            </a:pPr>
-            <a:r>
-              <a:rPr lang="en-US" sz="1000" dirty="0">
-                <a:solidFill>
-                  <a:schemeClr val="tx2"/>
-                </a:solidFill>
-              </a:rPr>
-              <a:t>1 – 26 Mar</a:t>
-            </a:r>
-            <a:endParaRPr lang="en-US" sz="1200" dirty="0"/>
-          </a:p>
-        </p:txBody>
-      </p:sp>
-      <p:sp>
-        <p:nvSpPr>
-          <p:cNvPr id="25" name="Bar 5 6"/>
+          <p:cNvPr id="5" name="Step chip 1"/>
           <p:cNvSpPr/>
           <p:nvPr/>
         </p:nvSpPr>
         <p:spPr>
           <a:xfrm>
-            <a:off x="6287147" y="4636008"/>
-            <a:ext cx="533759" cy="256032"/>
-          </a:xfrm>
-          <a:prstGeom prst="roundRect">
-            <a:avLst>
-              <a:gd name="adj" fmla="val 21429"/>
-            </a:avLst>
-          </a:prstGeom>
-          <a:solidFill>
-            <a:schemeClr val="accent1"/>
-          </a:solidFill>
-          <a:ln w="12700">
-            <a:solidFill>
-              <a:schemeClr val="accent1"/>
-            </a:solidFill>
-            <a:prstDash val="solid"/>
-          </a:ln>
-        </p:spPr>
-      </p:sp>
-      <p:sp>
-        <p:nvSpPr>
-          <p:cNvPr id="26" name="Row label 7"/>
-          <p:cNvSpPr txBox="1"/>
-          <p:nvPr/>
-        </p:nvSpPr>
-        <p:spPr>
-          <a:xfrm>
-            <a:off x="621792" y="5047488"/>
-            <a:ext cx="2468880" cy="566928"/>
-          </a:xfrm>
-          <a:prstGeom prst="rect">
-            <a:avLst/>
-          </a:prstGeom>
-          <a:noFill/>
-          <a:ln/>
-        </p:spPr>
-        <p:txBody>
-          <a:bodyPr wrap="square" lIns="0" tIns="0" rIns="0" bIns="0" rtlCol="0" anchor="ctr"/>
-          <a:lstStyle/>
-          <a:p>
-            <a:pPr indent="0" marL="0">
-              <a:buNone/>
-            </a:pPr>
-            <a:r>
-              <a:rPr lang="en-US" sz="1200" b="1" dirty="0">
-                <a:solidFill>
-                  <a:schemeClr val="tx1"/>
-                </a:solidFill>
-              </a:rPr>
-              <a:t>6  Review pilot outcomes</a:t>
-            </a:r>
-            <a:endParaRPr lang="en-US" sz="1200" dirty="0"/>
-          </a:p>
-          <a:p>
-            <a:pPr indent="0" marL="0">
-              <a:buNone/>
-            </a:pPr>
-            <a:r>
-              <a:rPr lang="en-US" sz="1000" dirty="0">
-                <a:solidFill>
-                  <a:schemeClr val="tx2"/>
-                </a:solidFill>
-              </a:rPr>
-              <a:t>Apr (SCo TBC)</a:t>
-            </a:r>
-            <a:endParaRPr lang="en-US" sz="1200" dirty="0"/>
-          </a:p>
-        </p:txBody>
-      </p:sp>
-      <p:sp>
-        <p:nvSpPr>
-          <p:cNvPr id="27" name="Bar 6 7"/>
-          <p:cNvSpPr/>
-          <p:nvPr/>
-        </p:nvSpPr>
-        <p:spPr>
-          <a:xfrm>
-            <a:off x="6884958" y="5202936"/>
-            <a:ext cx="683212" cy="256032"/>
-          </a:xfrm>
-          <a:prstGeom prst="roundRect">
-            <a:avLst>
-              <a:gd name="adj" fmla="val 21429"/>
-            </a:avLst>
-          </a:prstGeom>
-          <a:solidFill>
-            <a:schemeClr val="accent1"/>
-          </a:solidFill>
-          <a:ln w="12700">
-            <a:solidFill>
-              <a:schemeClr val="accent1"/>
-            </a:solidFill>
-            <a:prstDash val="solid"/>
-          </a:ln>
-        </p:spPr>
-      </p:sp>
-      <p:sp>
-        <p:nvSpPr>
-          <p:cNvPr id="28" name="SCo 26 Oct line"/>
-          <p:cNvSpPr/>
-          <p:nvPr/>
-        </p:nvSpPr>
-        <p:spPr>
-          <a:xfrm>
-            <a:off x="3596999" y="1627632"/>
-            <a:ext cx="0" cy="3986784"/>
-          </a:xfrm>
-          <a:prstGeom prst="line">
-            <a:avLst/>
-          </a:prstGeom>
-          <a:noFill/>
-          <a:ln w="12700">
-            <a:solidFill>
-              <a:schemeClr val="tx2"/>
-            </a:solidFill>
-            <a:prstDash val="dash"/>
-          </a:ln>
-        </p:spPr>
-      </p:sp>
-      <p:sp>
-        <p:nvSpPr>
-          <p:cNvPr id="29" name="SCo 26 Oct label"/>
-          <p:cNvSpPr txBox="1"/>
-          <p:nvPr/>
-        </p:nvSpPr>
-        <p:spPr>
-          <a:xfrm>
-            <a:off x="3414119" y="5687568"/>
-            <a:ext cx="1188720" cy="274320"/>
-          </a:xfrm>
-          <a:prstGeom prst="rect">
-            <a:avLst/>
-          </a:prstGeom>
-          <a:noFill/>
-          <a:ln/>
-        </p:spPr>
-        <p:txBody>
-          <a:bodyPr wrap="square" lIns="0" tIns="0" rIns="0" bIns="0" rtlCol="0" anchor="ctr"/>
-          <a:lstStyle/>
-          <a:p>
-            <a:pPr indent="0" marL="0">
-              <a:buNone/>
-            </a:pPr>
-            <a:r>
-              <a:rPr lang="en-US" sz="1100" b="1" dirty="0">
-                <a:solidFill>
-                  <a:schemeClr val="tx1"/>
-                </a:solidFill>
-              </a:rPr>
-              <a:t>SCo 26 Oct</a:t>
-            </a:r>
-            <a:endParaRPr lang="en-US" sz="1100" dirty="0"/>
-          </a:p>
-        </p:txBody>
-      </p:sp>
-      <p:sp>
-        <p:nvSpPr>
-          <p:cNvPr id="30" name="Legend swatch 1"/>
-          <p:cNvSpPr/>
-          <p:nvPr/>
-        </p:nvSpPr>
-        <p:spPr>
-          <a:xfrm>
-            <a:off x="621792" y="6126480"/>
-            <a:ext cx="274320" cy="146304"/>
+            <a:off x="731520" y="2034540"/>
+            <a:ext cx="1325880" cy="365760"/>
           </a:xfrm>
           <a:prstGeom prst="roundRect">
             <a:avLst>
@@ -3411,11 +3930,87 @@
             </a:avLst>
           </a:prstGeom>
           <a:solidFill>
-            <a:schemeClr val="accent3"/>
+            <a:schemeClr val="accent4"/>
+          </a:solidFill>
+          <a:ln/>
+        </p:spPr>
+        <p:txBody>
+          <a:bodyPr wrap="square" lIns="0" tIns="0" rIns="0" bIns="0" rtlCol="0" anchor="ctr"/>
+          <a:lstStyle/>
+          <a:p>
+            <a:pPr algn="ctr" indent="0" marL="0">
+              <a:buNone/>
+            </a:pPr>
+            <a:r>
+              <a:rPr lang="en-US" sz="1300" b="1" dirty="0">
+                <a:solidFill>
+                  <a:schemeClr val="bg1"/>
+                </a:solidFill>
+              </a:rPr>
+              <a:t>Ungku</a:t>
+            </a:r>
+            <a:endParaRPr lang="en-US" sz="1300" dirty="0"/>
+          </a:p>
+        </p:txBody>
+      </p:sp>
+      <p:sp>
+        <p:nvSpPr>
+          <p:cNvPr id="6" name="Step text 1"/>
+          <p:cNvSpPr txBox="1"/>
+          <p:nvPr/>
+        </p:nvSpPr>
+        <p:spPr>
+          <a:xfrm>
+            <a:off x="2240280" y="1691640"/>
+            <a:ext cx="5166360" cy="1051560"/>
+          </a:xfrm>
+          <a:prstGeom prst="rect">
+            <a:avLst/>
+          </a:prstGeom>
+          <a:noFill/>
+          <a:ln/>
+        </p:spPr>
+        <p:txBody>
+          <a:bodyPr wrap="square" lIns="0" tIns="0" rIns="0" bIns="0" rtlCol="0" anchor="ctr"/>
+          <a:lstStyle/>
+          <a:p>
+            <a:pPr indent="0" marL="0">
+              <a:buNone/>
+            </a:pPr>
+            <a:r>
+              <a:rPr lang="en-US" sz="1400" dirty="0">
+                <a:solidFill>
+                  <a:schemeClr val="tx1"/>
+                </a:solidFill>
+              </a:rPr>
+              <a:t>Update the Pilot Implementation Deck from the 8 Oct discussion and circulate to the team for review and feedback.</a:t>
+            </a:r>
+            <a:endParaRPr lang="en-US" sz="1400" dirty="0"/>
+          </a:p>
+        </p:txBody>
+      </p:sp>
+      <p:sp>
+        <p:nvSpPr>
+          <p:cNvPr id="7" name="Step card 2"/>
+          <p:cNvSpPr/>
+          <p:nvPr/>
+        </p:nvSpPr>
+        <p:spPr>
+          <a:xfrm>
+            <a:off x="548640" y="2907792"/>
+            <a:ext cx="7040880" cy="1051560"/>
+          </a:xfrm>
+          <a:prstGeom prst="roundRect">
+            <a:avLst>
+              <a:gd name="adj" fmla="val 8696"/>
+            </a:avLst>
+          </a:prstGeom>
+          <a:solidFill>
+            <a:schemeClr val="bg2"/>
           </a:solidFill>
           <a:ln w="12700">
             <a:solidFill>
-              <a:schemeClr val="accent3"/>
+              <a:schemeClr val="bg2"/>
             </a:solidFill>
             <a:prstDash val="solid"/>
           </a:ln>
@@ -3423,50 +4018,14 @@
       </p:sp>
       <p:sp>
         <p:nvSpPr>
-          <p:cNvPr id="31" name="Legend label 1"/>
-          <p:cNvSpPr txBox="1"/>
-          <p:nvPr/>
-        </p:nvSpPr>
-        <p:spPr>
-          <a:xfrm>
-            <a:off x="969264" y="6071616"/>
-            <a:ext cx="1097280" cy="256032"/>
-          </a:xfrm>
-          <a:prstGeom prst="rect">
-            <a:avLst/>
-          </a:prstGeom>
-          <a:noFill/>
-          <a:ln/>
-        </p:spPr>
-        <p:txBody>
-          <a:bodyPr wrap="square" lIns="0" tIns="0" rIns="0" bIns="0" rtlCol="0" anchor="ctr"/>
-          <a:lstStyle/>
-          <a:p>
-            <a:pPr indent="0" marL="0">
-              <a:buNone/>
-            </a:pPr>
-            <a:r>
-              <a:rPr lang="en-US" sz="1000" dirty="0">
-                <a:solidFill>
-                  <a:schemeClr val="tx2"/>
-                </a:solidFill>
-              </a:rPr>
-              <a:t>Ongoing</a:t>
-            </a:r>
-            <a:endParaRPr lang="en-US" sz="1000" dirty="0"/>
-          </a:p>
-        </p:txBody>
-      </p:sp>
-      <p:sp>
-        <p:nvSpPr>
-          <p:cNvPr id="32" name="Legend swatch 2"/>
+          <p:cNvPr id="8" name="Step chip 2"/>
           <p:cNvSpPr/>
           <p:nvPr/>
         </p:nvSpPr>
         <p:spPr>
           <a:xfrm>
-            <a:off x="2084832" y="6126480"/>
-            <a:ext cx="274320" cy="146304"/>
+            <a:off x="731520" y="3250692"/>
+            <a:ext cx="1325880" cy="365760"/>
           </a:xfrm>
           <a:prstGeom prst="roundRect">
             <a:avLst>
@@ -3474,11 +4033,87 @@
             </a:avLst>
           </a:prstGeom>
           <a:solidFill>
-            <a:schemeClr val="accent1"/>
+            <a:schemeClr val="accent4"/>
+          </a:solidFill>
+          <a:ln/>
+        </p:spPr>
+        <p:txBody>
+          <a:bodyPr wrap="square" lIns="0" tIns="0" rIns="0" bIns="0" rtlCol="0" anchor="ctr"/>
+          <a:lstStyle/>
+          <a:p>
+            <a:pPr algn="ctr" indent="0" marL="0">
+              <a:buNone/>
+            </a:pPr>
+            <a:r>
+              <a:rPr lang="en-US" sz="1300" b="1" dirty="0">
+                <a:solidFill>
+                  <a:schemeClr val="bg1"/>
+                </a:solidFill>
+              </a:rPr>
+              <a:t>Yusri</a:t>
+            </a:r>
+            <a:endParaRPr lang="en-US" sz="1300" dirty="0"/>
+          </a:p>
+        </p:txBody>
+      </p:sp>
+      <p:sp>
+        <p:nvSpPr>
+          <p:cNvPr id="9" name="Step text 2"/>
+          <p:cNvSpPr txBox="1"/>
+          <p:nvPr/>
+        </p:nvSpPr>
+        <p:spPr>
+          <a:xfrm>
+            <a:off x="2240280" y="2907792"/>
+            <a:ext cx="5166360" cy="1051560"/>
+          </a:xfrm>
+          <a:prstGeom prst="rect">
+            <a:avLst/>
+          </a:prstGeom>
+          <a:noFill/>
+          <a:ln/>
+        </p:spPr>
+        <p:txBody>
+          <a:bodyPr wrap="square" lIns="0" tIns="0" rIns="0" bIns="0" rtlCol="0" anchor="ctr"/>
+          <a:lstStyle/>
+          <a:p>
+            <a:pPr indent="0" marL="0">
+              <a:buNone/>
+            </a:pPr>
+            <a:r>
+              <a:rPr lang="en-US" sz="1400" dirty="0">
+                <a:solidFill>
+                  <a:schemeClr val="tx1"/>
+                </a:solidFill>
+              </a:rPr>
+              <a:t>Reach out to Sid for assistance and coordination on Workstream 1 (Generic Electrical Engineering).</a:t>
+            </a:r>
+            <a:endParaRPr lang="en-US" sz="1400" dirty="0"/>
+          </a:p>
+        </p:txBody>
+      </p:sp>
+      <p:sp>
+        <p:nvSpPr>
+          <p:cNvPr id="10" name="Step card 3"/>
+          <p:cNvSpPr/>
+          <p:nvPr/>
+        </p:nvSpPr>
+        <p:spPr>
+          <a:xfrm>
+            <a:off x="548640" y="4123944"/>
+            <a:ext cx="7040880" cy="1051560"/>
+          </a:xfrm>
+          <a:prstGeom prst="roundRect">
+            <a:avLst>
+              <a:gd name="adj" fmla="val 8696"/>
+            </a:avLst>
+          </a:prstGeom>
+          <a:solidFill>
+            <a:schemeClr val="bg2"/>
           </a:solidFill>
           <a:ln w="12700">
             <a:solidFill>
-              <a:schemeClr val="accent1"/>
+              <a:schemeClr val="bg2"/>
             </a:solidFill>
             <a:prstDash val="solid"/>
           </a:ln>
@@ -3486,50 +4121,14 @@
       </p:sp>
       <p:sp>
         <p:nvSpPr>
-          <p:cNvPr id="33" name="Legend label 2"/>
-          <p:cNvSpPr txBox="1"/>
-          <p:nvPr/>
-        </p:nvSpPr>
-        <p:spPr>
-          <a:xfrm>
-            <a:off x="2432304" y="6071616"/>
-            <a:ext cx="1097280" cy="256032"/>
-          </a:xfrm>
-          <a:prstGeom prst="rect">
-            <a:avLst/>
-          </a:prstGeom>
-          <a:noFill/>
-          <a:ln/>
-        </p:spPr>
-        <p:txBody>
-          <a:bodyPr wrap="square" lIns="0" tIns="0" rIns="0" bIns="0" rtlCol="0" anchor="ctr"/>
-          <a:lstStyle/>
-          <a:p>
-            <a:pPr indent="0" marL="0">
-              <a:buNone/>
-            </a:pPr>
-            <a:r>
-              <a:rPr lang="en-US" sz="1000" dirty="0">
-                <a:solidFill>
-                  <a:schemeClr val="tx2"/>
-                </a:solidFill>
-              </a:rPr>
-              <a:t>Upcoming</a:t>
-            </a:r>
-            <a:endParaRPr lang="en-US" sz="1000" dirty="0"/>
-          </a:p>
-        </p:txBody>
-      </p:sp>
-      <p:sp>
-        <p:nvSpPr>
-          <p:cNvPr id="34" name="Legend swatch 3"/>
+          <p:cNvPr id="11" name="Step chip 3"/>
           <p:cNvSpPr/>
           <p:nvPr/>
         </p:nvSpPr>
         <p:spPr>
           <a:xfrm>
-            <a:off x="3547872" y="6126480"/>
-            <a:ext cx="274320" cy="146304"/>
+            <a:off x="731520" y="4466844"/>
+            <a:ext cx="1325880" cy="365760"/>
           </a:xfrm>
           <a:prstGeom prst="roundRect">
             <a:avLst>
@@ -3537,11 +4136,87 @@
             </a:avLst>
           </a:prstGeom>
           <a:solidFill>
-            <a:schemeClr val="accent4"/>
+            <a:schemeClr val="accent5"/>
+          </a:solidFill>
+          <a:ln/>
+        </p:spPr>
+        <p:txBody>
+          <a:bodyPr wrap="square" lIns="0" tIns="0" rIns="0" bIns="0" rtlCol="0" anchor="ctr"/>
+          <a:lstStyle/>
+          <a:p>
+            <a:pPr algn="ctr" indent="0" marL="0">
+              <a:buNone/>
+            </a:pPr>
+            <a:r>
+              <a:rPr lang="en-US" sz="1300" b="1" dirty="0">
+                <a:solidFill>
+                  <a:schemeClr val="tx1"/>
+                </a:solidFill>
+              </a:rPr>
+              <a:t>Thu 15 Oct</a:t>
+            </a:r>
+            <a:endParaRPr lang="en-US" sz="1300" dirty="0"/>
+          </a:p>
+        </p:txBody>
+      </p:sp>
+      <p:sp>
+        <p:nvSpPr>
+          <p:cNvPr id="12" name="Step text 3"/>
+          <p:cNvSpPr txBox="1"/>
+          <p:nvPr/>
+        </p:nvSpPr>
+        <p:spPr>
+          <a:xfrm>
+            <a:off x="2240280" y="4123944"/>
+            <a:ext cx="5166360" cy="1051560"/>
+          </a:xfrm>
+          <a:prstGeom prst="rect">
+            <a:avLst/>
+          </a:prstGeom>
+          <a:noFill/>
+          <a:ln/>
+        </p:spPr>
+        <p:txBody>
+          <a:bodyPr wrap="square" lIns="0" tIns="0" rIns="0" bIns="0" rtlCol="0" anchor="ctr"/>
+          <a:lstStyle/>
+          <a:p>
+            <a:pPr indent="0" marL="0">
+              <a:buNone/>
+            </a:pPr>
+            <a:r>
+              <a:rPr lang="en-US" sz="1400" dirty="0">
+                <a:solidFill>
+                  <a:schemeClr val="tx1"/>
+                </a:solidFill>
+              </a:rPr>
+              <a:t>Reconvene: each workstream shares progress, key developments and any areas requiring further alignment.</a:t>
+            </a:r>
+            <a:endParaRPr lang="en-US" sz="1400" dirty="0"/>
+          </a:p>
+        </p:txBody>
+      </p:sp>
+      <p:sp>
+        <p:nvSpPr>
+          <p:cNvPr id="13" name="Step card 4"/>
+          <p:cNvSpPr/>
+          <p:nvPr/>
+        </p:nvSpPr>
+        <p:spPr>
+          <a:xfrm>
+            <a:off x="548640" y="5340096"/>
+            <a:ext cx="7040880" cy="1051560"/>
+          </a:xfrm>
+          <a:prstGeom prst="roundRect">
+            <a:avLst>
+              <a:gd name="adj" fmla="val 8696"/>
+            </a:avLst>
+          </a:prstGeom>
+          <a:solidFill>
+            <a:schemeClr val="bg2"/>
           </a:solidFill>
           <a:ln w="12700">
             <a:solidFill>
-              <a:schemeClr val="accent4"/>
+              <a:schemeClr val="bg2"/>
             </a:solidFill>
             <a:prstDash val="solid"/>
           </a:ln>
@@ -3549,14 +4224,54 @@
       </p:sp>
       <p:sp>
         <p:nvSpPr>
-          <p:cNvPr id="35" name="Legend label 3"/>
+          <p:cNvPr id="14" name="Step chip 4"/>
+          <p:cNvSpPr/>
+          <p:nvPr/>
+        </p:nvSpPr>
+        <p:spPr>
+          <a:xfrm>
+            <a:off x="731520" y="5682996"/>
+            <a:ext cx="1325880" cy="365760"/>
+          </a:xfrm>
+          <a:prstGeom prst="roundRect">
+            <a:avLst>
+              <a:gd name="adj" fmla="val 25000"/>
+            </a:avLst>
+          </a:prstGeom>
+          <a:solidFill>
+            <a:schemeClr val="accent5"/>
+          </a:solidFill>
+          <a:ln/>
+        </p:spPr>
+        <p:txBody>
+          <a:bodyPr wrap="square" lIns="0" tIns="0" rIns="0" bIns="0" rtlCol="0" anchor="ctr"/>
+          <a:lstStyle/>
+          <a:p>
+            <a:pPr algn="ctr" indent="0" marL="0">
+              <a:buNone/>
+            </a:pPr>
+            <a:r>
+              <a:rPr lang="en-US" sz="1300" b="1" dirty="0">
+                <a:solidFill>
+                  <a:schemeClr val="tx1"/>
+                </a:solidFill>
+              </a:rPr>
+              <a:t>26 Oct</a:t>
+            </a:r>
+            <a:endParaRPr lang="en-US" sz="1300" dirty="0"/>
+          </a:p>
+        </p:txBody>
+      </p:sp>
+      <p:sp>
+        <p:nvSpPr>
+          <p:cNvPr id="15" name="Step text 4"/>
           <p:cNvSpPr txBox="1"/>
           <p:nvPr/>
         </p:nvSpPr>
         <p:spPr>
           <a:xfrm>
-            <a:off x="3895344" y="6071616"/>
-            <a:ext cx="1097280" cy="256032"/>
+            <a:off x="2240280" y="5340096"/>
+            <a:ext cx="5166360" cy="1051560"/>
           </a:xfrm>
           <a:prstGeom prst="rect">
             <a:avLst/>
@@ -3572,27 +4287,27 @@
               <a:buNone/>
             </a:pPr>
             <a:r>
-              <a:rPr lang="en-US" sz="1000" dirty="0">
-                <a:solidFill>
-                  <a:schemeClr val="tx2"/>
-                </a:solidFill>
-              </a:rPr>
-              <a:t>Enabling activity</a:t>
-            </a:r>
-            <a:endParaRPr lang="en-US" sz="1000" dirty="0"/>
-          </a:p>
-        </p:txBody>
-      </p:sp>
-      <p:sp>
-        <p:nvSpPr>
-          <p:cNvPr id="36" name="Right panel"/>
+              <a:rPr lang="en-US" sz="1400" dirty="0">
+                <a:solidFill>
+                  <a:schemeClr val="tx1"/>
+                </a:solidFill>
+              </a:rPr>
+              <a:t>Present the revised timeline and asks at the Steering Committee.</a:t>
+            </a:r>
+            <a:endParaRPr lang="en-US" sz="1400" dirty="0"/>
+          </a:p>
+        </p:txBody>
+      </p:sp>
+      <p:sp>
+        <p:nvSpPr>
+          <p:cNvPr id="16" name="Right panel"/>
           <p:cNvSpPr/>
           <p:nvPr/>
         </p:nvSpPr>
         <p:spPr>
           <a:xfrm>
-            <a:off x="8001000" y="1234440"/>
-            <a:ext cx="3639312" cy="5074920"/>
+            <a:off x="8001000" y="1188720"/>
+            <a:ext cx="3639312" cy="5120640"/>
           </a:xfrm>
           <a:prstGeom prst="roundRect">
             <a:avLst>
@@ -3612,14 +4327,14 @@
       </p:sp>
       <p:sp>
         <p:nvSpPr>
-          <p:cNvPr id="37" name="Asks and risks"/>
+          <p:cNvPr id="17" name="Asks and risks"/>
           <p:cNvSpPr txBox="1"/>
           <p:nvPr/>
         </p:nvSpPr>
         <p:spPr>
           <a:xfrm>
-            <a:off x="8183880" y="1371600"/>
-            <a:ext cx="3273552" cy="4800600"/>
+            <a:off x="8183880" y="1325880"/>
+            <a:ext cx="3273552" cy="4846320"/>
           </a:xfrm>
           <a:prstGeom prst="rect">
             <a:avLst/>
@@ -3662,7 +4377,7 @@
                   <a:schemeClr val="tx1"/>
                 </a:solidFill>
               </a:rPr>
-              <a:t>Endorse the revised timeline and reset the Stage 3 gates (pilot report, handover, showcase)</a:t>
+              <a:t>Endorse the three-workstream structure and revised timeline; reset the Stage 3 gates (pilot report, handover, showcase)</a:t>
             </a:r>
             <a:endParaRPr lang="en-US" sz="1600" dirty="0"/>
           </a:p>
@@ -3754,7 +4469,7 @@
                   <a:schemeClr val="tx1"/>
                 </a:solidFill>
               </a:rPr>
-              <a:t>Approval delay slips Steps 2 to 6 one-for-one: start with the portion already shared</a:t>
+              <a:t>Approval delay slips downstream steps one-for-one: start with the portion already shared</a:t>
             </a:r>
             <a:endParaRPr lang="en-US" sz="1600" dirty="0"/>
           </a:p>
@@ -3772,12 +4487,15 @@
                   <a:schemeClr val="tx1"/>
                 </a:solidFill>
               </a:rPr>
-              <a:t>Year-end leave overlaps Step 3: book PETRONAS specialist sessions by Nov</a:t>
+              <a:t>Workstreams drift apart: JCP/JF alignment checked at every update, starting 15 Oct</a:t>
             </a:r>
             <a:endParaRPr lang="en-US" sz="1600" dirty="0"/>
           </a:p>
           <a:p>
             <a:pPr marL="342900" indent="-342900">
+              <a:spcAft>
+                <a:spcPts val="400"/>
+              </a:spcAft>
               <a:buSzPct val="100000"/>
               <a:buChar char="•"/>
             </a:pPr>
@@ -3787,7 +4505,25 @@
                   <a:schemeClr val="tx1"/>
                 </a:solidFill>
               </a:rPr>
-              <a:t>Access for staff outside the PETRONAS email domain: agree the route with ICT early</a:t>
+              <a:t>Year-end leave overlaps review stage: book PETRONAS specialist sessions by Nov</a:t>
+            </a:r>
+            <a:endParaRPr lang="en-US" sz="1600" dirty="0"/>
+          </a:p>
+          <a:p>
+            <a:pPr marL="342900" indent="-342900">
+              <a:spcAft>
+                <a:spcPts val="400"/>
+              </a:spcAft>
+              <a:buSzPct val="100000"/>
+              <a:buChar char="•"/>
+            </a:pPr>
+            <a:r>
+              <a:rPr lang="en-US" sz="1200" dirty="0">
+                <a:solidFill>
+                  <a:schemeClr val="tx1"/>
+                </a:solidFill>
+              </a:rPr>
+              <a:t>Access for staff outside the PETRONAS email domain: agree route with ICT early</a:t>
             </a:r>
             <a:endParaRPr lang="en-US" sz="1600" dirty="0"/>
           </a:p>
@@ -3824,13 +4560,13 @@
         <a:srgbClr val="00A651"/>
       </a:accent2>
       <a:accent3>
-        <a:srgbClr val="F5A623"/>
+        <a:srgbClr val="7B4FBF"/>
       </a:accent3>
       <a:accent4>
         <a:srgbClr val="7F7F7F"/>
       </a:accent4>
       <a:accent5>
-        <a:srgbClr val="FFF200"/>
+        <a:srgbClr val="F5A623"/>
       </a:accent5>
       <a:accent6>
         <a:srgbClr val="E3F6FA"/>
